--- a/Lecture_Slides/PH 123 Lecture 33.pptx
+++ b/Lecture_Slides/PH 123 Lecture 33.pptx
@@ -17,18 +17,18 @@
     <p:sldId id="335" r:id="rId8"/>
     <p:sldId id="328" r:id="rId9"/>
     <p:sldId id="329" r:id="rId10"/>
-    <p:sldId id="330" r:id="rId11"/>
-    <p:sldId id="336" r:id="rId12"/>
-    <p:sldId id="331" r:id="rId13"/>
-    <p:sldId id="332" r:id="rId14"/>
-    <p:sldId id="333" r:id="rId15"/>
-    <p:sldId id="334" r:id="rId16"/>
-    <p:sldId id="337" r:id="rId17"/>
-    <p:sldId id="339" r:id="rId18"/>
-    <p:sldId id="338" r:id="rId19"/>
-    <p:sldId id="257" r:id="rId20"/>
-    <p:sldId id="340" r:id="rId21"/>
-    <p:sldId id="283" r:id="rId22"/>
+    <p:sldId id="336" r:id="rId11"/>
+    <p:sldId id="331" r:id="rId12"/>
+    <p:sldId id="332" r:id="rId13"/>
+    <p:sldId id="333" r:id="rId14"/>
+    <p:sldId id="334" r:id="rId15"/>
+    <p:sldId id="337" r:id="rId16"/>
+    <p:sldId id="339" r:id="rId17"/>
+    <p:sldId id="338" r:id="rId18"/>
+    <p:sldId id="257" r:id="rId19"/>
+    <p:sldId id="340" r:id="rId20"/>
+    <p:sldId id="283" r:id="rId21"/>
+    <p:sldId id="330" r:id="rId22"/>
     <p:sldId id="268" r:id="rId23"/>
     <p:sldId id="277" r:id="rId24"/>
     <p:sldId id="278" r:id="rId25"/>
@@ -167,800 +167,20 @@
 </p:presentation>
 </file>
 
-<file path=ppt/revisionInfo.xml><?xml version="1.0" encoding="utf-8"?>
-<p1510:revInfo xmlns:a="http://schemas.openxmlformats.org/drawingml/2006/main" xmlns:r="http://schemas.openxmlformats.org/officeDocument/2006/relationships" xmlns:p1510="http://schemas.microsoft.com/office/powerpoint/2015/10/main">
-  <p1510:revLst>
-    <p1510:client id="{521B3133-1E4F-49E5-8DD6-91DE1B512717}" v="54" dt="2025-07-01T20:50:49.051"/>
-  </p1510:revLst>
-</p1510:revInfo>
-</file>
-
 <file path=ppt/changesInfos/changesInfo1.xml><?xml version="1.0" encoding="utf-8"?>
 <pc:chgInfo xmlns:a="http://schemas.openxmlformats.org/drawingml/2006/main" xmlns:r="http://schemas.openxmlformats.org/officeDocument/2006/relationships" xmlns:ac="http://schemas.microsoft.com/office/drawing/2013/main/command" xmlns:pc="http://schemas.microsoft.com/office/powerpoint/2013/main/command">
   <pc:docChgLst>
-    <pc:chgData name="Lines, Todd" userId="afaf7c3a-e8aa-4568-882a-02ad8f9e19b0" providerId="ADAL" clId="{521B3133-1E4F-49E5-8DD6-91DE1B512717}"/>
-    <pc:docChg chg="custSel addSld modSld sldOrd">
-      <pc:chgData name="Lines, Todd" userId="afaf7c3a-e8aa-4568-882a-02ad8f9e19b0" providerId="ADAL" clId="{521B3133-1E4F-49E5-8DD6-91DE1B512717}" dt="2025-07-01T20:50:49.051" v="329"/>
+    <pc:chgData name="Lines, Todd" userId="afaf7c3a-e8aa-4568-882a-02ad8f9e19b0" providerId="ADAL" clId="{5FF5AC1B-ABA9-43D7-A1E3-2D92732CD6E2}"/>
+    <pc:docChg chg="modSld sldOrd">
+      <pc:chgData name="Lines, Todd" userId="afaf7c3a-e8aa-4568-882a-02ad8f9e19b0" providerId="ADAL" clId="{5FF5AC1B-ABA9-43D7-A1E3-2D92732CD6E2}" dt="2026-03-24T20:52:18.915" v="1"/>
       <pc:docMkLst>
         <pc:docMk/>
       </pc:docMkLst>
-      <pc:sldChg chg="add">
-        <pc:chgData name="Lines, Todd" userId="afaf7c3a-e8aa-4568-882a-02ad8f9e19b0" providerId="ADAL" clId="{521B3133-1E4F-49E5-8DD6-91DE1B512717}" dt="2025-07-01T20:50:49.051" v="329"/>
-        <pc:sldMkLst>
-          <pc:docMk/>
-          <pc:sldMk cId="0" sldId="257"/>
-        </pc:sldMkLst>
-      </pc:sldChg>
-      <pc:sldChg chg="modSp new mod">
-        <pc:chgData name="Lines, Todd" userId="afaf7c3a-e8aa-4568-882a-02ad8f9e19b0" providerId="ADAL" clId="{521B3133-1E4F-49E5-8DD6-91DE1B512717}" dt="2025-07-01T19:07:03.784" v="10" actId="20577"/>
-        <pc:sldMkLst>
-          <pc:docMk/>
-          <pc:sldMk cId="4209100043" sldId="282"/>
-        </pc:sldMkLst>
-        <pc:spChg chg="mod">
-          <ac:chgData name="Lines, Todd" userId="afaf7c3a-e8aa-4568-882a-02ad8f9e19b0" providerId="ADAL" clId="{521B3133-1E4F-49E5-8DD6-91DE1B512717}" dt="2025-07-01T19:07:03.784" v="10" actId="20577"/>
-          <ac:spMkLst>
-            <pc:docMk/>
-            <pc:sldMk cId="4209100043" sldId="282"/>
-            <ac:spMk id="2" creationId="{23370CC7-8570-E090-12F0-488B7962F25A}"/>
-          </ac:spMkLst>
-        </pc:spChg>
-      </pc:sldChg>
-      <pc:sldChg chg="modSp new mod">
-        <pc:chgData name="Lines, Todd" userId="afaf7c3a-e8aa-4568-882a-02ad8f9e19b0" providerId="ADAL" clId="{521B3133-1E4F-49E5-8DD6-91DE1B512717}" dt="2025-07-01T19:07:11.558" v="14" actId="20577"/>
-        <pc:sldMkLst>
-          <pc:docMk/>
-          <pc:sldMk cId="3088791111" sldId="283"/>
-        </pc:sldMkLst>
-        <pc:spChg chg="mod">
-          <ac:chgData name="Lines, Todd" userId="afaf7c3a-e8aa-4568-882a-02ad8f9e19b0" providerId="ADAL" clId="{521B3133-1E4F-49E5-8DD6-91DE1B512717}" dt="2025-07-01T19:07:11.558" v="14" actId="20577"/>
-          <ac:spMkLst>
-            <pc:docMk/>
-            <pc:sldMk cId="3088791111" sldId="283"/>
-            <ac:spMk id="2" creationId="{16DAB29F-EF60-0E73-477B-FEA20BD0C485}"/>
-          </ac:spMkLst>
-        </pc:spChg>
-      </pc:sldChg>
-      <pc:sldChg chg="add">
-        <pc:chgData name="Lines, Todd" userId="afaf7c3a-e8aa-4568-882a-02ad8f9e19b0" providerId="ADAL" clId="{521B3133-1E4F-49E5-8DD6-91DE1B512717}" dt="2025-07-01T19:14:02.712" v="17"/>
-        <pc:sldMkLst>
-          <pc:docMk/>
-          <pc:sldMk cId="527013498" sldId="323"/>
-        </pc:sldMkLst>
-      </pc:sldChg>
-      <pc:sldChg chg="add">
-        <pc:chgData name="Lines, Todd" userId="afaf7c3a-e8aa-4568-882a-02ad8f9e19b0" providerId="ADAL" clId="{521B3133-1E4F-49E5-8DD6-91DE1B512717}" dt="2025-07-01T19:14:02.712" v="17"/>
-        <pc:sldMkLst>
-          <pc:docMk/>
-          <pc:sldMk cId="596017313" sldId="324"/>
-        </pc:sldMkLst>
-      </pc:sldChg>
-      <pc:sldChg chg="add ord">
-        <pc:chgData name="Lines, Todd" userId="afaf7c3a-e8aa-4568-882a-02ad8f9e19b0" providerId="ADAL" clId="{521B3133-1E4F-49E5-8DD6-91DE1B512717}" dt="2025-07-01T19:14:05.166" v="19"/>
-        <pc:sldMkLst>
-          <pc:docMk/>
-          <pc:sldMk cId="909363630" sldId="325"/>
-        </pc:sldMkLst>
-      </pc:sldChg>
-      <pc:sldChg chg="add">
-        <pc:chgData name="Lines, Todd" userId="afaf7c3a-e8aa-4568-882a-02ad8f9e19b0" providerId="ADAL" clId="{521B3133-1E4F-49E5-8DD6-91DE1B512717}" dt="2025-07-01T19:14:33.571" v="20"/>
-        <pc:sldMkLst>
-          <pc:docMk/>
-          <pc:sldMk cId="1827767260" sldId="326"/>
-        </pc:sldMkLst>
-      </pc:sldChg>
-      <pc:sldChg chg="add">
-        <pc:chgData name="Lines, Todd" userId="afaf7c3a-e8aa-4568-882a-02ad8f9e19b0" providerId="ADAL" clId="{521B3133-1E4F-49E5-8DD6-91DE1B512717}" dt="2025-07-01T19:09:04.375" v="15"/>
-        <pc:sldMkLst>
-          <pc:docMk/>
-          <pc:sldMk cId="3094017573" sldId="327"/>
-        </pc:sldMkLst>
-      </pc:sldChg>
-      <pc:sldChg chg="add">
-        <pc:chgData name="Lines, Todd" userId="afaf7c3a-e8aa-4568-882a-02ad8f9e19b0" providerId="ADAL" clId="{521B3133-1E4F-49E5-8DD6-91DE1B512717}" dt="2025-07-01T19:09:04.375" v="15"/>
-        <pc:sldMkLst>
-          <pc:docMk/>
-          <pc:sldMk cId="0" sldId="328"/>
-        </pc:sldMkLst>
-      </pc:sldChg>
-      <pc:sldChg chg="add">
-        <pc:chgData name="Lines, Todd" userId="afaf7c3a-e8aa-4568-882a-02ad8f9e19b0" providerId="ADAL" clId="{521B3133-1E4F-49E5-8DD6-91DE1B512717}" dt="2025-07-01T19:09:04.375" v="15"/>
-        <pc:sldMkLst>
-          <pc:docMk/>
-          <pc:sldMk cId="0" sldId="329"/>
-        </pc:sldMkLst>
-      </pc:sldChg>
-      <pc:sldChg chg="add">
-        <pc:chgData name="Lines, Todd" userId="afaf7c3a-e8aa-4568-882a-02ad8f9e19b0" providerId="ADAL" clId="{521B3133-1E4F-49E5-8DD6-91DE1B512717}" dt="2025-07-01T19:09:04.375" v="15"/>
+      <pc:sldChg chg="ord">
+        <pc:chgData name="Lines, Todd" userId="afaf7c3a-e8aa-4568-882a-02ad8f9e19b0" providerId="ADAL" clId="{5FF5AC1B-ABA9-43D7-A1E3-2D92732CD6E2}" dt="2026-03-24T20:52:18.915" v="1"/>
         <pc:sldMkLst>
           <pc:docMk/>
           <pc:sldMk cId="2282245805" sldId="330"/>
-        </pc:sldMkLst>
-      </pc:sldChg>
-      <pc:sldChg chg="add">
-        <pc:chgData name="Lines, Todd" userId="afaf7c3a-e8aa-4568-882a-02ad8f9e19b0" providerId="ADAL" clId="{521B3133-1E4F-49E5-8DD6-91DE1B512717}" dt="2025-07-01T19:09:04.375" v="15"/>
-        <pc:sldMkLst>
-          <pc:docMk/>
-          <pc:sldMk cId="0" sldId="331"/>
-        </pc:sldMkLst>
-      </pc:sldChg>
-      <pc:sldChg chg="add">
-        <pc:chgData name="Lines, Todd" userId="afaf7c3a-e8aa-4568-882a-02ad8f9e19b0" providerId="ADAL" clId="{521B3133-1E4F-49E5-8DD6-91DE1B512717}" dt="2025-07-01T19:09:04.375" v="15"/>
-        <pc:sldMkLst>
-          <pc:docMk/>
-          <pc:sldMk cId="1802529842" sldId="332"/>
-        </pc:sldMkLst>
-      </pc:sldChg>
-      <pc:sldChg chg="add">
-        <pc:chgData name="Lines, Todd" userId="afaf7c3a-e8aa-4568-882a-02ad8f9e19b0" providerId="ADAL" clId="{521B3133-1E4F-49E5-8DD6-91DE1B512717}" dt="2025-07-01T19:09:04.375" v="15"/>
-        <pc:sldMkLst>
-          <pc:docMk/>
-          <pc:sldMk cId="0" sldId="333"/>
-        </pc:sldMkLst>
-      </pc:sldChg>
-      <pc:sldChg chg="add">
-        <pc:chgData name="Lines, Todd" userId="afaf7c3a-e8aa-4568-882a-02ad8f9e19b0" providerId="ADAL" clId="{521B3133-1E4F-49E5-8DD6-91DE1B512717}" dt="2025-07-01T19:09:04.375" v="15"/>
-        <pc:sldMkLst>
-          <pc:docMk/>
-          <pc:sldMk cId="0" sldId="334"/>
-        </pc:sldMkLst>
-      </pc:sldChg>
-      <pc:sldChg chg="addSp delSp modSp new mod">
-        <pc:chgData name="Lines, Todd" userId="afaf7c3a-e8aa-4568-882a-02ad8f9e19b0" providerId="ADAL" clId="{521B3133-1E4F-49E5-8DD6-91DE1B512717}" dt="2025-07-01T19:22:50.316" v="148" actId="21"/>
-        <pc:sldMkLst>
-          <pc:docMk/>
-          <pc:sldMk cId="3545275300" sldId="335"/>
-        </pc:sldMkLst>
-        <pc:spChg chg="del">
-          <ac:chgData name="Lines, Todd" userId="afaf7c3a-e8aa-4568-882a-02ad8f9e19b0" providerId="ADAL" clId="{521B3133-1E4F-49E5-8DD6-91DE1B512717}" dt="2025-07-01T19:18:31.628" v="22" actId="478"/>
-          <ac:spMkLst>
-            <pc:docMk/>
-            <pc:sldMk cId="3545275300" sldId="335"/>
-            <ac:spMk id="2" creationId="{16651C4E-9B2D-C0EE-7638-D2F177ECBCD6}"/>
-          </ac:spMkLst>
-        </pc:spChg>
-        <pc:spChg chg="del">
-          <ac:chgData name="Lines, Todd" userId="afaf7c3a-e8aa-4568-882a-02ad8f9e19b0" providerId="ADAL" clId="{521B3133-1E4F-49E5-8DD6-91DE1B512717}" dt="2025-07-01T19:18:31.628" v="22" actId="478"/>
-          <ac:spMkLst>
-            <pc:docMk/>
-            <pc:sldMk cId="3545275300" sldId="335"/>
-            <ac:spMk id="3" creationId="{3AB17EFF-0AB5-6956-D15C-791DF7345E47}"/>
-          </ac:spMkLst>
-        </pc:spChg>
-        <pc:spChg chg="add mod">
-          <ac:chgData name="Lines, Todd" userId="afaf7c3a-e8aa-4568-882a-02ad8f9e19b0" providerId="ADAL" clId="{521B3133-1E4F-49E5-8DD6-91DE1B512717}" dt="2025-07-01T19:22:02.005" v="141" actId="1076"/>
-          <ac:spMkLst>
-            <pc:docMk/>
-            <pc:sldMk cId="3545275300" sldId="335"/>
-            <ac:spMk id="7" creationId="{54B8847C-70C7-1CBB-04CC-0E557642B418}"/>
-          </ac:spMkLst>
-        </pc:spChg>
-        <pc:spChg chg="add mod">
-          <ac:chgData name="Lines, Todd" userId="afaf7c3a-e8aa-4568-882a-02ad8f9e19b0" providerId="ADAL" clId="{521B3133-1E4F-49E5-8DD6-91DE1B512717}" dt="2025-07-01T19:22:02.005" v="141" actId="1076"/>
-          <ac:spMkLst>
-            <pc:docMk/>
-            <pc:sldMk cId="3545275300" sldId="335"/>
-            <ac:spMk id="11" creationId="{9A98D6F5-497E-F464-3580-1DB05C4C766E}"/>
-          </ac:spMkLst>
-        </pc:spChg>
-        <pc:picChg chg="add del mod">
-          <ac:chgData name="Lines, Todd" userId="afaf7c3a-e8aa-4568-882a-02ad8f9e19b0" providerId="ADAL" clId="{521B3133-1E4F-49E5-8DD6-91DE1B512717}" dt="2025-07-01T19:21:28.833" v="119" actId="478"/>
-          <ac:picMkLst>
-            <pc:docMk/>
-            <pc:sldMk cId="3545275300" sldId="335"/>
-            <ac:picMk id="4" creationId="{5235D50A-A7E3-E7AD-41AD-B4282A33843D}"/>
-          </ac:picMkLst>
-        </pc:picChg>
-        <pc:picChg chg="add mod ord">
-          <ac:chgData name="Lines, Todd" userId="afaf7c3a-e8aa-4568-882a-02ad8f9e19b0" providerId="ADAL" clId="{521B3133-1E4F-49E5-8DD6-91DE1B512717}" dt="2025-07-01T19:22:02.005" v="141" actId="1076"/>
-          <ac:picMkLst>
-            <pc:docMk/>
-            <pc:sldMk cId="3545275300" sldId="335"/>
-            <ac:picMk id="12" creationId="{0AC845BC-D9AF-EB5D-401A-035E041A14C2}"/>
-          </ac:picMkLst>
-        </pc:picChg>
-        <pc:picChg chg="del mod">
-          <ac:chgData name="Lines, Todd" userId="afaf7c3a-e8aa-4568-882a-02ad8f9e19b0" providerId="ADAL" clId="{521B3133-1E4F-49E5-8DD6-91DE1B512717}" dt="2025-07-01T19:22:50.316" v="148" actId="21"/>
-          <ac:picMkLst>
-            <pc:docMk/>
-            <pc:sldMk cId="3545275300" sldId="335"/>
-            <ac:picMk id="19" creationId="{0965B61B-7F64-D88E-898C-41A63CBF65EF}"/>
-          </ac:picMkLst>
-        </pc:picChg>
-        <pc:cxnChg chg="add mod">
-          <ac:chgData name="Lines, Todd" userId="afaf7c3a-e8aa-4568-882a-02ad8f9e19b0" providerId="ADAL" clId="{521B3133-1E4F-49E5-8DD6-91DE1B512717}" dt="2025-07-01T19:22:32.616" v="145" actId="14100"/>
-          <ac:cxnSpMkLst>
-            <pc:docMk/>
-            <pc:sldMk cId="3545275300" sldId="335"/>
-            <ac:cxnSpMk id="6" creationId="{4469B039-97C2-1FED-955F-5E389FE06651}"/>
-          </ac:cxnSpMkLst>
-        </pc:cxnChg>
-        <pc:cxnChg chg="add mod">
-          <ac:chgData name="Lines, Todd" userId="afaf7c3a-e8aa-4568-882a-02ad8f9e19b0" providerId="ADAL" clId="{521B3133-1E4F-49E5-8DD6-91DE1B512717}" dt="2025-07-01T19:22:36.503" v="146" actId="14100"/>
-          <ac:cxnSpMkLst>
-            <pc:docMk/>
-            <pc:sldMk cId="3545275300" sldId="335"/>
-            <ac:cxnSpMk id="9" creationId="{799D321B-EE50-0EDB-5529-14A06244404A}"/>
-          </ac:cxnSpMkLst>
-        </pc:cxnChg>
-      </pc:sldChg>
-      <pc:sldChg chg="addSp delSp modSp new mod">
-        <pc:chgData name="Lines, Todd" userId="afaf7c3a-e8aa-4568-882a-02ad8f9e19b0" providerId="ADAL" clId="{521B3133-1E4F-49E5-8DD6-91DE1B512717}" dt="2025-07-01T19:46:29.864" v="209" actId="21"/>
-        <pc:sldMkLst>
-          <pc:docMk/>
-          <pc:sldMk cId="1089458129" sldId="336"/>
-        </pc:sldMkLst>
-        <pc:spChg chg="del">
-          <ac:chgData name="Lines, Todd" userId="afaf7c3a-e8aa-4568-882a-02ad8f9e19b0" providerId="ADAL" clId="{521B3133-1E4F-49E5-8DD6-91DE1B512717}" dt="2025-07-01T19:43:30.248" v="153" actId="478"/>
-          <ac:spMkLst>
-            <pc:docMk/>
-            <pc:sldMk cId="1089458129" sldId="336"/>
-            <ac:spMk id="2" creationId="{F516AE6C-2A43-77A6-6FA3-65E865C08EC6}"/>
-          </ac:spMkLst>
-        </pc:spChg>
-        <pc:spChg chg="del mod">
-          <ac:chgData name="Lines, Todd" userId="afaf7c3a-e8aa-4568-882a-02ad8f9e19b0" providerId="ADAL" clId="{521B3133-1E4F-49E5-8DD6-91DE1B512717}" dt="2025-07-01T19:43:30.248" v="153" actId="478"/>
-          <ac:spMkLst>
-            <pc:docMk/>
-            <pc:sldMk cId="1089458129" sldId="336"/>
-            <ac:spMk id="3" creationId="{DD3B506A-0F6E-FF97-263A-FD889A59643D}"/>
-          </ac:spMkLst>
-        </pc:spChg>
-        <pc:spChg chg="add mod">
-          <ac:chgData name="Lines, Todd" userId="afaf7c3a-e8aa-4568-882a-02ad8f9e19b0" providerId="ADAL" clId="{521B3133-1E4F-49E5-8DD6-91DE1B512717}" dt="2025-07-01T19:46:18.655" v="207" actId="1076"/>
-          <ac:spMkLst>
-            <pc:docMk/>
-            <pc:sldMk cId="1089458129" sldId="336"/>
-            <ac:spMk id="10" creationId="{A17EAC1C-5153-DE75-0364-91418C6E3609}"/>
-          </ac:spMkLst>
-        </pc:spChg>
-        <pc:spChg chg="add mod">
-          <ac:chgData name="Lines, Todd" userId="afaf7c3a-e8aa-4568-882a-02ad8f9e19b0" providerId="ADAL" clId="{521B3133-1E4F-49E5-8DD6-91DE1B512717}" dt="2025-07-01T19:46:14.081" v="206" actId="1036"/>
-          <ac:spMkLst>
-            <pc:docMk/>
-            <pc:sldMk cId="1089458129" sldId="336"/>
-            <ac:spMk id="12" creationId="{B77D87C7-24D9-3DF2-88F6-21F6C955592D}"/>
-          </ac:spMkLst>
-        </pc:spChg>
-        <pc:graphicFrameChg chg="add mod">
-          <ac:chgData name="Lines, Todd" userId="afaf7c3a-e8aa-4568-882a-02ad8f9e19b0" providerId="ADAL" clId="{521B3133-1E4F-49E5-8DD6-91DE1B512717}" dt="2025-07-01T19:43:23.794" v="151"/>
-          <ac:graphicFrameMkLst>
-            <pc:docMk/>
-            <pc:sldMk cId="1089458129" sldId="336"/>
-            <ac:graphicFrameMk id="4" creationId="{F1EF95E7-1716-48A2-8D1A-AD77B96FEE91}"/>
-          </ac:graphicFrameMkLst>
-        </pc:graphicFrameChg>
-        <pc:picChg chg="del mod">
-          <ac:chgData name="Lines, Todd" userId="afaf7c3a-e8aa-4568-882a-02ad8f9e19b0" providerId="ADAL" clId="{521B3133-1E4F-49E5-8DD6-91DE1B512717}" dt="2025-07-01T19:45:11.933" v="174" actId="21"/>
-          <ac:picMkLst>
-            <pc:docMk/>
-            <pc:sldMk cId="1089458129" sldId="336"/>
-            <ac:picMk id="11" creationId="{CE5471FA-43A1-117E-0FDC-A61454D24400}"/>
-          </ac:picMkLst>
-        </pc:picChg>
-        <pc:picChg chg="del mod">
-          <ac:chgData name="Lines, Todd" userId="afaf7c3a-e8aa-4568-882a-02ad8f9e19b0" providerId="ADAL" clId="{521B3133-1E4F-49E5-8DD6-91DE1B512717}" dt="2025-07-01T19:46:29.864" v="209" actId="21"/>
-          <ac:picMkLst>
-            <pc:docMk/>
-            <pc:sldMk cId="1089458129" sldId="336"/>
-            <ac:picMk id="15" creationId="{9DD02217-4120-9BD4-0933-50910E5D40A2}"/>
-          </ac:picMkLst>
-        </pc:picChg>
-        <pc:cxnChg chg="add mod">
-          <ac:chgData name="Lines, Todd" userId="afaf7c3a-e8aa-4568-882a-02ad8f9e19b0" providerId="ADAL" clId="{521B3133-1E4F-49E5-8DD6-91DE1B512717}" dt="2025-07-01T19:44:24.378" v="158" actId="1076"/>
-          <ac:cxnSpMkLst>
-            <pc:docMk/>
-            <pc:sldMk cId="1089458129" sldId="336"/>
-            <ac:cxnSpMk id="6" creationId="{C7A64DBA-B0D6-2F26-C844-369D31C5524B}"/>
-          </ac:cxnSpMkLst>
-        </pc:cxnChg>
-        <pc:cxnChg chg="add mod">
-          <ac:chgData name="Lines, Todd" userId="afaf7c3a-e8aa-4568-882a-02ad8f9e19b0" providerId="ADAL" clId="{521B3133-1E4F-49E5-8DD6-91DE1B512717}" dt="2025-07-01T19:44:33.971" v="167" actId="1037"/>
-          <ac:cxnSpMkLst>
-            <pc:docMk/>
-            <pc:sldMk cId="1089458129" sldId="336"/>
-            <ac:cxnSpMk id="8" creationId="{EFCDBABF-C208-C878-DD9A-023E13892188}"/>
-          </ac:cxnSpMkLst>
-        </pc:cxnChg>
-        <pc:cxnChg chg="add mod">
-          <ac:chgData name="Lines, Todd" userId="afaf7c3a-e8aa-4568-882a-02ad8f9e19b0" providerId="ADAL" clId="{521B3133-1E4F-49E5-8DD6-91DE1B512717}" dt="2025-07-01T19:46:04.709" v="183" actId="1037"/>
-          <ac:cxnSpMkLst>
-            <pc:docMk/>
-            <pc:sldMk cId="1089458129" sldId="336"/>
-            <ac:cxnSpMk id="13" creationId="{F795DF1E-CA30-164F-9AAB-07B09E8D0FF3}"/>
-          </ac:cxnSpMkLst>
-        </pc:cxnChg>
-      </pc:sldChg>
-      <pc:sldChg chg="addSp modSp new mod">
-        <pc:chgData name="Lines, Todd" userId="afaf7c3a-e8aa-4568-882a-02ad8f9e19b0" providerId="ADAL" clId="{521B3133-1E4F-49E5-8DD6-91DE1B512717}" dt="2025-07-01T20:20:14.838" v="225" actId="20577"/>
-        <pc:sldMkLst>
-          <pc:docMk/>
-          <pc:sldMk cId="3461320330" sldId="337"/>
-        </pc:sldMkLst>
-        <pc:spChg chg="mod">
-          <ac:chgData name="Lines, Todd" userId="afaf7c3a-e8aa-4568-882a-02ad8f9e19b0" providerId="ADAL" clId="{521B3133-1E4F-49E5-8DD6-91DE1B512717}" dt="2025-07-01T20:20:14.838" v="225" actId="20577"/>
-          <ac:spMkLst>
-            <pc:docMk/>
-            <pc:sldMk cId="3461320330" sldId="337"/>
-            <ac:spMk id="2" creationId="{59B714F2-685F-D0EF-E846-DA0C5FBB83C2}"/>
-          </ac:spMkLst>
-        </pc:spChg>
-        <pc:spChg chg="mod">
-          <ac:chgData name="Lines, Todd" userId="afaf7c3a-e8aa-4568-882a-02ad8f9e19b0" providerId="ADAL" clId="{521B3133-1E4F-49E5-8DD6-91DE1B512717}" dt="2025-07-01T20:20:09.602" v="211"/>
-          <ac:spMkLst>
-            <pc:docMk/>
-            <pc:sldMk cId="3461320330" sldId="337"/>
-            <ac:spMk id="13" creationId="{F3F3ECC9-B36A-ED03-DA60-665FB1E8A21E}"/>
-          </ac:spMkLst>
-        </pc:spChg>
-        <pc:spChg chg="mod">
-          <ac:chgData name="Lines, Todd" userId="afaf7c3a-e8aa-4568-882a-02ad8f9e19b0" providerId="ADAL" clId="{521B3133-1E4F-49E5-8DD6-91DE1B512717}" dt="2025-07-01T20:20:09.602" v="211"/>
-          <ac:spMkLst>
-            <pc:docMk/>
-            <pc:sldMk cId="3461320330" sldId="337"/>
-            <ac:spMk id="15" creationId="{749E73B7-5920-5182-B855-7BBDFF4E2DD0}"/>
-          </ac:spMkLst>
-        </pc:spChg>
-        <pc:spChg chg="mod">
-          <ac:chgData name="Lines, Todd" userId="afaf7c3a-e8aa-4568-882a-02ad8f9e19b0" providerId="ADAL" clId="{521B3133-1E4F-49E5-8DD6-91DE1B512717}" dt="2025-07-01T20:20:09.602" v="211"/>
-          <ac:spMkLst>
-            <pc:docMk/>
-            <pc:sldMk cId="3461320330" sldId="337"/>
-            <ac:spMk id="16" creationId="{46D82C56-1B47-9E83-94CF-D936B0484299}"/>
-          </ac:spMkLst>
-        </pc:spChg>
-        <pc:spChg chg="mod">
-          <ac:chgData name="Lines, Todd" userId="afaf7c3a-e8aa-4568-882a-02ad8f9e19b0" providerId="ADAL" clId="{521B3133-1E4F-49E5-8DD6-91DE1B512717}" dt="2025-07-01T20:20:09.602" v="211"/>
-          <ac:spMkLst>
-            <pc:docMk/>
-            <pc:sldMk cId="3461320330" sldId="337"/>
-            <ac:spMk id="22" creationId="{F9056321-7BBC-91D2-CBF7-4F70D6A3BA43}"/>
-          </ac:spMkLst>
-        </pc:spChg>
-        <pc:spChg chg="mod">
-          <ac:chgData name="Lines, Todd" userId="afaf7c3a-e8aa-4568-882a-02ad8f9e19b0" providerId="ADAL" clId="{521B3133-1E4F-49E5-8DD6-91DE1B512717}" dt="2025-07-01T20:20:09.602" v="211"/>
-          <ac:spMkLst>
-            <pc:docMk/>
-            <pc:sldMk cId="3461320330" sldId="337"/>
-            <ac:spMk id="24" creationId="{31ECF11B-D8CE-431B-D701-45448410CE69}"/>
-          </ac:spMkLst>
-        </pc:spChg>
-        <pc:spChg chg="mod">
-          <ac:chgData name="Lines, Todd" userId="afaf7c3a-e8aa-4568-882a-02ad8f9e19b0" providerId="ADAL" clId="{521B3133-1E4F-49E5-8DD6-91DE1B512717}" dt="2025-07-01T20:20:09.602" v="211"/>
-          <ac:spMkLst>
-            <pc:docMk/>
-            <pc:sldMk cId="3461320330" sldId="337"/>
-            <ac:spMk id="27" creationId="{79B2FC05-D8F6-C3D8-5FED-EE18E1FAC096}"/>
-          </ac:spMkLst>
-        </pc:spChg>
-        <pc:spChg chg="mod">
-          <ac:chgData name="Lines, Todd" userId="afaf7c3a-e8aa-4568-882a-02ad8f9e19b0" providerId="ADAL" clId="{521B3133-1E4F-49E5-8DD6-91DE1B512717}" dt="2025-07-01T20:20:09.602" v="211"/>
-          <ac:spMkLst>
-            <pc:docMk/>
-            <pc:sldMk cId="3461320330" sldId="337"/>
-            <ac:spMk id="38" creationId="{ECF32835-477F-46C8-90D0-D82E060B104F}"/>
-          </ac:spMkLst>
-        </pc:spChg>
-        <pc:spChg chg="mod">
-          <ac:chgData name="Lines, Todd" userId="afaf7c3a-e8aa-4568-882a-02ad8f9e19b0" providerId="ADAL" clId="{521B3133-1E4F-49E5-8DD6-91DE1B512717}" dt="2025-07-01T20:20:09.602" v="211"/>
-          <ac:spMkLst>
-            <pc:docMk/>
-            <pc:sldMk cId="3461320330" sldId="337"/>
-            <ac:spMk id="40" creationId="{57F126CF-6655-C642-4654-ACDF3769E9C5}"/>
-          </ac:spMkLst>
-        </pc:spChg>
-        <pc:spChg chg="mod">
-          <ac:chgData name="Lines, Todd" userId="afaf7c3a-e8aa-4568-882a-02ad8f9e19b0" providerId="ADAL" clId="{521B3133-1E4F-49E5-8DD6-91DE1B512717}" dt="2025-07-01T20:20:09.602" v="211"/>
-          <ac:spMkLst>
-            <pc:docMk/>
-            <pc:sldMk cId="3461320330" sldId="337"/>
-            <ac:spMk id="42" creationId="{24A2AB96-5E9D-F802-5031-5FCF831C9EFE}"/>
-          </ac:spMkLst>
-        </pc:spChg>
-        <pc:spChg chg="mod">
-          <ac:chgData name="Lines, Todd" userId="afaf7c3a-e8aa-4568-882a-02ad8f9e19b0" providerId="ADAL" clId="{521B3133-1E4F-49E5-8DD6-91DE1B512717}" dt="2025-07-01T20:20:09.602" v="211"/>
-          <ac:spMkLst>
-            <pc:docMk/>
-            <pc:sldMk cId="3461320330" sldId="337"/>
-            <ac:spMk id="45" creationId="{6F39EA8E-79B1-1B87-15EA-3B54838D28C2}"/>
-          </ac:spMkLst>
-        </pc:spChg>
-      </pc:sldChg>
-      <pc:sldChg chg="addSp delSp modSp add mod ord">
-        <pc:chgData name="Lines, Todd" userId="afaf7c3a-e8aa-4568-882a-02ad8f9e19b0" providerId="ADAL" clId="{521B3133-1E4F-49E5-8DD6-91DE1B512717}" dt="2025-07-01T20:28:25.680" v="328" actId="1582"/>
-        <pc:sldMkLst>
-          <pc:docMk/>
-          <pc:sldMk cId="1355674550" sldId="338"/>
-        </pc:sldMkLst>
-        <pc:spChg chg="del mod topLvl">
-          <ac:chgData name="Lines, Todd" userId="afaf7c3a-e8aa-4568-882a-02ad8f9e19b0" providerId="ADAL" clId="{521B3133-1E4F-49E5-8DD6-91DE1B512717}" dt="2025-07-01T20:20:30.951" v="229" actId="478"/>
-          <ac:spMkLst>
-            <pc:docMk/>
-            <pc:sldMk cId="1355674550" sldId="338"/>
-            <ac:spMk id="4" creationId="{EF6C056F-B430-094D-F041-C671DE80B0C2}"/>
-          </ac:spMkLst>
-        </pc:spChg>
-        <pc:spChg chg="del">
-          <ac:chgData name="Lines, Todd" userId="afaf7c3a-e8aa-4568-882a-02ad8f9e19b0" providerId="ADAL" clId="{521B3133-1E4F-49E5-8DD6-91DE1B512717}" dt="2025-07-01T20:20:30.951" v="229" actId="478"/>
-          <ac:spMkLst>
-            <pc:docMk/>
-            <pc:sldMk cId="1355674550" sldId="338"/>
-            <ac:spMk id="5" creationId="{8B7B16F9-1D37-4A52-B38B-E89F52D87EEB}"/>
-          </ac:spMkLst>
-        </pc:spChg>
-        <pc:spChg chg="del mod topLvl">
-          <ac:chgData name="Lines, Todd" userId="afaf7c3a-e8aa-4568-882a-02ad8f9e19b0" providerId="ADAL" clId="{521B3133-1E4F-49E5-8DD6-91DE1B512717}" dt="2025-07-01T20:20:30.951" v="229" actId="478"/>
-          <ac:spMkLst>
-            <pc:docMk/>
-            <pc:sldMk cId="1355674550" sldId="338"/>
-            <ac:spMk id="6" creationId="{D6880F80-CA24-0CC4-8F0B-E72DE0F9FAFF}"/>
-          </ac:spMkLst>
-        </pc:spChg>
-        <pc:spChg chg="del">
-          <ac:chgData name="Lines, Todd" userId="afaf7c3a-e8aa-4568-882a-02ad8f9e19b0" providerId="ADAL" clId="{521B3133-1E4F-49E5-8DD6-91DE1B512717}" dt="2025-07-01T20:20:28.582" v="228" actId="478"/>
-          <ac:spMkLst>
-            <pc:docMk/>
-            <pc:sldMk cId="1355674550" sldId="338"/>
-            <ac:spMk id="8" creationId="{CA1F8ED9-2485-6D84-F09A-7E944EEF4BDA}"/>
-          </ac:spMkLst>
-        </pc:spChg>
-        <pc:spChg chg="del">
-          <ac:chgData name="Lines, Todd" userId="afaf7c3a-e8aa-4568-882a-02ad8f9e19b0" providerId="ADAL" clId="{521B3133-1E4F-49E5-8DD6-91DE1B512717}" dt="2025-07-01T20:20:30.951" v="229" actId="478"/>
-          <ac:spMkLst>
-            <pc:docMk/>
-            <pc:sldMk cId="1355674550" sldId="338"/>
-            <ac:spMk id="9" creationId="{E9B1B0A8-ED8D-172B-3B5A-F1429AEEA582}"/>
-          </ac:spMkLst>
-        </pc:spChg>
-        <pc:spChg chg="del">
-          <ac:chgData name="Lines, Todd" userId="afaf7c3a-e8aa-4568-882a-02ad8f9e19b0" providerId="ADAL" clId="{521B3133-1E4F-49E5-8DD6-91DE1B512717}" dt="2025-07-01T20:20:33.625" v="230" actId="478"/>
-          <ac:spMkLst>
-            <pc:docMk/>
-            <pc:sldMk cId="1355674550" sldId="338"/>
-            <ac:spMk id="10" creationId="{DFBEDDB5-044D-4A5F-2303-4B4C61C73923}"/>
-          </ac:spMkLst>
-        </pc:spChg>
-        <pc:spChg chg="del mod topLvl">
-          <ac:chgData name="Lines, Todd" userId="afaf7c3a-e8aa-4568-882a-02ad8f9e19b0" providerId="ADAL" clId="{521B3133-1E4F-49E5-8DD6-91DE1B512717}" dt="2025-07-01T20:20:30.951" v="229" actId="478"/>
-          <ac:spMkLst>
-            <pc:docMk/>
-            <pc:sldMk cId="1355674550" sldId="338"/>
-            <ac:spMk id="11" creationId="{B125DB18-CB88-AD3B-73AA-4FCDD4F0676B}"/>
-          </ac:spMkLst>
-        </pc:spChg>
-        <pc:spChg chg="del mod topLvl">
-          <ac:chgData name="Lines, Todd" userId="afaf7c3a-e8aa-4568-882a-02ad8f9e19b0" providerId="ADAL" clId="{521B3133-1E4F-49E5-8DD6-91DE1B512717}" dt="2025-07-01T20:26:17.031" v="299" actId="478"/>
-          <ac:spMkLst>
-            <pc:docMk/>
-            <pc:sldMk cId="1355674550" sldId="338"/>
-            <ac:spMk id="12" creationId="{FE904699-B680-7354-E28B-079CB77E2392}"/>
-          </ac:spMkLst>
-        </pc:spChg>
-        <pc:spChg chg="del">
-          <ac:chgData name="Lines, Todd" userId="afaf7c3a-e8aa-4568-882a-02ad8f9e19b0" providerId="ADAL" clId="{521B3133-1E4F-49E5-8DD6-91DE1B512717}" dt="2025-07-01T20:20:30.951" v="229" actId="478"/>
-          <ac:spMkLst>
-            <pc:docMk/>
-            <pc:sldMk cId="1355674550" sldId="338"/>
-            <ac:spMk id="13" creationId="{44ADABD8-3F28-34F5-3750-7875AA917564}"/>
-          </ac:spMkLst>
-        </pc:spChg>
-        <pc:spChg chg="del mod">
-          <ac:chgData name="Lines, Todd" userId="afaf7c3a-e8aa-4568-882a-02ad8f9e19b0" providerId="ADAL" clId="{521B3133-1E4F-49E5-8DD6-91DE1B512717}" dt="2025-07-01T20:25:09.092" v="283" actId="478"/>
-          <ac:spMkLst>
-            <pc:docMk/>
-            <pc:sldMk cId="1355674550" sldId="338"/>
-            <ac:spMk id="14" creationId="{FE66B045-45D1-D41A-4215-BD57D5132C33}"/>
-          </ac:spMkLst>
-        </pc:spChg>
-        <pc:spChg chg="del mod">
-          <ac:chgData name="Lines, Todd" userId="afaf7c3a-e8aa-4568-882a-02ad8f9e19b0" providerId="ADAL" clId="{521B3133-1E4F-49E5-8DD6-91DE1B512717}" dt="2025-07-01T20:25:14.607" v="287" actId="478"/>
-          <ac:spMkLst>
-            <pc:docMk/>
-            <pc:sldMk cId="1355674550" sldId="338"/>
-            <ac:spMk id="15" creationId="{1F78904F-7D10-BBCA-E801-DBCB7C5D5537}"/>
-          </ac:spMkLst>
-        </pc:spChg>
-        <pc:spChg chg="del mod topLvl">
-          <ac:chgData name="Lines, Todd" userId="afaf7c3a-e8aa-4568-882a-02ad8f9e19b0" providerId="ADAL" clId="{521B3133-1E4F-49E5-8DD6-91DE1B512717}" dt="2025-07-01T20:25:17.763" v="288" actId="478"/>
-          <ac:spMkLst>
-            <pc:docMk/>
-            <pc:sldMk cId="1355674550" sldId="338"/>
-            <ac:spMk id="16" creationId="{4E3D10AE-DCF1-9D48-C4E2-0C19204B90D3}"/>
-          </ac:spMkLst>
-        </pc:spChg>
-        <pc:spChg chg="del">
-          <ac:chgData name="Lines, Todd" userId="afaf7c3a-e8aa-4568-882a-02ad8f9e19b0" providerId="ADAL" clId="{521B3133-1E4F-49E5-8DD6-91DE1B512717}" dt="2025-07-01T20:25:12.044" v="285" actId="478"/>
-          <ac:spMkLst>
-            <pc:docMk/>
-            <pc:sldMk cId="1355674550" sldId="338"/>
-            <ac:spMk id="18" creationId="{1EF1DEDE-D7CC-450E-EE70-1D48B367C67D}"/>
-          </ac:spMkLst>
-        </pc:spChg>
-        <pc:spChg chg="del">
-          <ac:chgData name="Lines, Todd" userId="afaf7c3a-e8aa-4568-882a-02ad8f9e19b0" providerId="ADAL" clId="{521B3133-1E4F-49E5-8DD6-91DE1B512717}" dt="2025-07-01T20:20:34.280" v="231" actId="478"/>
-          <ac:spMkLst>
-            <pc:docMk/>
-            <pc:sldMk cId="1355674550" sldId="338"/>
-            <ac:spMk id="19" creationId="{799B525F-984B-F10F-F62C-AB7CD4D9A1A2}"/>
-          </ac:spMkLst>
-        </pc:spChg>
-        <pc:spChg chg="del">
-          <ac:chgData name="Lines, Todd" userId="afaf7c3a-e8aa-4568-882a-02ad8f9e19b0" providerId="ADAL" clId="{521B3133-1E4F-49E5-8DD6-91DE1B512717}" dt="2025-07-01T20:26:15.653" v="298" actId="478"/>
-          <ac:spMkLst>
-            <pc:docMk/>
-            <pc:sldMk cId="1355674550" sldId="338"/>
-            <ac:spMk id="20" creationId="{FB1DE110-7165-74C3-C7C5-5887F43789E9}"/>
-          </ac:spMkLst>
-        </pc:spChg>
-        <pc:spChg chg="del">
-          <ac:chgData name="Lines, Todd" userId="afaf7c3a-e8aa-4568-882a-02ad8f9e19b0" providerId="ADAL" clId="{521B3133-1E4F-49E5-8DD6-91DE1B512717}" dt="2025-07-01T20:20:30.951" v="229" actId="478"/>
-          <ac:spMkLst>
-            <pc:docMk/>
-            <pc:sldMk cId="1355674550" sldId="338"/>
-            <ac:spMk id="21" creationId="{A4BE03FA-D4CE-E310-AB57-8C5DF9A52FBE}"/>
-          </ac:spMkLst>
-        </pc:spChg>
-        <pc:spChg chg="del">
-          <ac:chgData name="Lines, Todd" userId="afaf7c3a-e8aa-4568-882a-02ad8f9e19b0" providerId="ADAL" clId="{521B3133-1E4F-49E5-8DD6-91DE1B512717}" dt="2025-07-01T20:20:48.296" v="235" actId="478"/>
-          <ac:spMkLst>
-            <pc:docMk/>
-            <pc:sldMk cId="1355674550" sldId="338"/>
-            <ac:spMk id="22" creationId="{FA87CAFD-04B2-98B9-BC7C-C8E996A43D2F}"/>
-          </ac:spMkLst>
-        </pc:spChg>
-        <pc:spChg chg="del mod">
-          <ac:chgData name="Lines, Todd" userId="afaf7c3a-e8aa-4568-882a-02ad8f9e19b0" providerId="ADAL" clId="{521B3133-1E4F-49E5-8DD6-91DE1B512717}" dt="2025-07-01T20:20:49.367" v="236" actId="478"/>
-          <ac:spMkLst>
-            <pc:docMk/>
-            <pc:sldMk cId="1355674550" sldId="338"/>
-            <ac:spMk id="23" creationId="{061996F1-A021-8730-EB24-4B50263AC28B}"/>
-          </ac:spMkLst>
-        </pc:spChg>
-        <pc:spChg chg="mod">
-          <ac:chgData name="Lines, Todd" userId="afaf7c3a-e8aa-4568-882a-02ad8f9e19b0" providerId="ADAL" clId="{521B3133-1E4F-49E5-8DD6-91DE1B512717}" dt="2025-07-01T20:20:45.489" v="234" actId="1076"/>
-          <ac:spMkLst>
-            <pc:docMk/>
-            <pc:sldMk cId="1355674550" sldId="338"/>
-            <ac:spMk id="27" creationId="{975B46AC-45BB-11DC-94B3-6C1E44F624B7}"/>
-          </ac:spMkLst>
-        </pc:spChg>
-        <pc:spChg chg="mod">
-          <ac:chgData name="Lines, Todd" userId="afaf7c3a-e8aa-4568-882a-02ad8f9e19b0" providerId="ADAL" clId="{521B3133-1E4F-49E5-8DD6-91DE1B512717}" dt="2025-07-01T20:20:45.489" v="234" actId="1076"/>
-          <ac:spMkLst>
-            <pc:docMk/>
-            <pc:sldMk cId="1355674550" sldId="338"/>
-            <ac:spMk id="29" creationId="{0D51E887-9DF9-6EE8-B8DF-85E9AEF3B530}"/>
-          </ac:spMkLst>
-        </pc:spChg>
-        <pc:spChg chg="mod">
-          <ac:chgData name="Lines, Todd" userId="afaf7c3a-e8aa-4568-882a-02ad8f9e19b0" providerId="ADAL" clId="{521B3133-1E4F-49E5-8DD6-91DE1B512717}" dt="2025-07-01T20:20:45.489" v="234" actId="1076"/>
-          <ac:spMkLst>
-            <pc:docMk/>
-            <pc:sldMk cId="1355674550" sldId="338"/>
-            <ac:spMk id="30" creationId="{19DE4A4C-66BC-BAAD-4033-A7CE717E0C36}"/>
-          </ac:spMkLst>
-        </pc:spChg>
-        <pc:spChg chg="mod">
-          <ac:chgData name="Lines, Todd" userId="afaf7c3a-e8aa-4568-882a-02ad8f9e19b0" providerId="ADAL" clId="{521B3133-1E4F-49E5-8DD6-91DE1B512717}" dt="2025-07-01T20:20:45.489" v="234" actId="1076"/>
-          <ac:spMkLst>
-            <pc:docMk/>
-            <pc:sldMk cId="1355674550" sldId="338"/>
-            <ac:spMk id="35" creationId="{61A65FBC-EC17-CAF0-12CF-C971B8E83DB9}"/>
-          </ac:spMkLst>
-        </pc:spChg>
-        <pc:spChg chg="mod">
-          <ac:chgData name="Lines, Todd" userId="afaf7c3a-e8aa-4568-882a-02ad8f9e19b0" providerId="ADAL" clId="{521B3133-1E4F-49E5-8DD6-91DE1B512717}" dt="2025-07-01T20:20:24.916" v="227" actId="165"/>
-          <ac:spMkLst>
-            <pc:docMk/>
-            <pc:sldMk cId="1355674550" sldId="338"/>
-            <ac:spMk id="36" creationId="{96A6B302-D826-DECE-51A3-4C73E72DBD32}"/>
-          </ac:spMkLst>
-        </pc:spChg>
-        <pc:spChg chg="mod">
-          <ac:chgData name="Lines, Todd" userId="afaf7c3a-e8aa-4568-882a-02ad8f9e19b0" providerId="ADAL" clId="{521B3133-1E4F-49E5-8DD6-91DE1B512717}" dt="2025-07-01T20:20:45.489" v="234" actId="1076"/>
-          <ac:spMkLst>
-            <pc:docMk/>
-            <pc:sldMk cId="1355674550" sldId="338"/>
-            <ac:spMk id="38" creationId="{B32E5106-813E-7F2B-12CE-D9A9D9B7194E}"/>
-          </ac:spMkLst>
-        </pc:spChg>
-        <pc:spChg chg="mod">
-          <ac:chgData name="Lines, Todd" userId="afaf7c3a-e8aa-4568-882a-02ad8f9e19b0" providerId="ADAL" clId="{521B3133-1E4F-49E5-8DD6-91DE1B512717}" dt="2025-07-01T20:20:45.489" v="234" actId="1076"/>
-          <ac:spMkLst>
-            <pc:docMk/>
-            <pc:sldMk cId="1355674550" sldId="338"/>
-            <ac:spMk id="39" creationId="{4F058294-9883-418D-C67D-8A0EA5EFF212}"/>
-          </ac:spMkLst>
-        </pc:spChg>
-        <pc:spChg chg="mod">
-          <ac:chgData name="Lines, Todd" userId="afaf7c3a-e8aa-4568-882a-02ad8f9e19b0" providerId="ADAL" clId="{521B3133-1E4F-49E5-8DD6-91DE1B512717}" dt="2025-07-01T20:20:45.489" v="234" actId="1076"/>
-          <ac:spMkLst>
-            <pc:docMk/>
-            <pc:sldMk cId="1355674550" sldId="338"/>
-            <ac:spMk id="43" creationId="{10888C4A-84C3-AD18-E137-0F3B8590C69D}"/>
-          </ac:spMkLst>
-        </pc:spChg>
-        <pc:spChg chg="mod">
-          <ac:chgData name="Lines, Todd" userId="afaf7c3a-e8aa-4568-882a-02ad8f9e19b0" providerId="ADAL" clId="{521B3133-1E4F-49E5-8DD6-91DE1B512717}" dt="2025-07-01T20:20:24.916" v="227" actId="165"/>
-          <ac:spMkLst>
-            <pc:docMk/>
-            <pc:sldMk cId="1355674550" sldId="338"/>
-            <ac:spMk id="52" creationId="{01E47076-B03A-9514-FCAE-E8554D4ECCD8}"/>
-          </ac:spMkLst>
-        </pc:spChg>
-        <pc:spChg chg="mod">
-          <ac:chgData name="Lines, Todd" userId="afaf7c3a-e8aa-4568-882a-02ad8f9e19b0" providerId="ADAL" clId="{521B3133-1E4F-49E5-8DD6-91DE1B512717}" dt="2025-07-01T20:20:24.916" v="227" actId="165"/>
-          <ac:spMkLst>
-            <pc:docMk/>
-            <pc:sldMk cId="1355674550" sldId="338"/>
-            <ac:spMk id="58" creationId="{7D6ED858-77A1-2C0E-DC4B-E68AD462258B}"/>
-          </ac:spMkLst>
-        </pc:spChg>
-        <pc:spChg chg="mod">
-          <ac:chgData name="Lines, Todd" userId="afaf7c3a-e8aa-4568-882a-02ad8f9e19b0" providerId="ADAL" clId="{521B3133-1E4F-49E5-8DD6-91DE1B512717}" dt="2025-07-01T20:20:24.916" v="227" actId="165"/>
-          <ac:spMkLst>
-            <pc:docMk/>
-            <pc:sldMk cId="1355674550" sldId="338"/>
-            <ac:spMk id="60" creationId="{13D9E986-7E38-3FF3-64DE-8F95B47A5635}"/>
-          </ac:spMkLst>
-        </pc:spChg>
-        <pc:spChg chg="add del mod">
-          <ac:chgData name="Lines, Todd" userId="afaf7c3a-e8aa-4568-882a-02ad8f9e19b0" providerId="ADAL" clId="{521B3133-1E4F-49E5-8DD6-91DE1B512717}" dt="2025-07-01T20:25:11.231" v="284" actId="478"/>
-          <ac:spMkLst>
-            <pc:docMk/>
-            <pc:sldMk cId="1355674550" sldId="338"/>
-            <ac:spMk id="66" creationId="{44D373FD-162F-346F-618B-520346E23C56}"/>
-          </ac:spMkLst>
-        </pc:spChg>
-        <pc:spChg chg="add mod">
-          <ac:chgData name="Lines, Todd" userId="afaf7c3a-e8aa-4568-882a-02ad8f9e19b0" providerId="ADAL" clId="{521B3133-1E4F-49E5-8DD6-91DE1B512717}" dt="2025-07-01T20:21:42.613" v="270" actId="1076"/>
-          <ac:spMkLst>
-            <pc:docMk/>
-            <pc:sldMk cId="1355674550" sldId="338"/>
-            <ac:spMk id="67" creationId="{DC47FC5F-5FA6-B452-B3FA-1BDE805CEBC3}"/>
-          </ac:spMkLst>
-        </pc:spChg>
-        <pc:spChg chg="add mod">
-          <ac:chgData name="Lines, Todd" userId="afaf7c3a-e8aa-4568-882a-02ad8f9e19b0" providerId="ADAL" clId="{521B3133-1E4F-49E5-8DD6-91DE1B512717}" dt="2025-07-01T20:21:45.330" v="272" actId="1076"/>
-          <ac:spMkLst>
-            <pc:docMk/>
-            <pc:sldMk cId="1355674550" sldId="338"/>
-            <ac:spMk id="68" creationId="{182FED84-2F4E-E02A-8DA6-1A2921DB815A}"/>
-          </ac:spMkLst>
-        </pc:spChg>
-        <pc:spChg chg="add mod">
-          <ac:chgData name="Lines, Todd" userId="afaf7c3a-e8aa-4568-882a-02ad8f9e19b0" providerId="ADAL" clId="{521B3133-1E4F-49E5-8DD6-91DE1B512717}" dt="2025-07-01T20:26:22.682" v="302" actId="1076"/>
-          <ac:spMkLst>
-            <pc:docMk/>
-            <pc:sldMk cId="1355674550" sldId="338"/>
-            <ac:spMk id="69" creationId="{AA1D8FEF-3A24-01E0-0FB4-A118C5980106}"/>
-          </ac:spMkLst>
-        </pc:spChg>
-        <pc:spChg chg="add mod">
-          <ac:chgData name="Lines, Todd" userId="afaf7c3a-e8aa-4568-882a-02ad8f9e19b0" providerId="ADAL" clId="{521B3133-1E4F-49E5-8DD6-91DE1B512717}" dt="2025-07-01T20:21:49.941" v="276" actId="1076"/>
-          <ac:spMkLst>
-            <pc:docMk/>
-            <pc:sldMk cId="1355674550" sldId="338"/>
-            <ac:spMk id="70" creationId="{C0526BF1-ABE3-4042-2A93-1066D1A77756}"/>
-          </ac:spMkLst>
-        </pc:spChg>
-        <pc:spChg chg="add del">
-          <ac:chgData name="Lines, Todd" userId="afaf7c3a-e8aa-4568-882a-02ad8f9e19b0" providerId="ADAL" clId="{521B3133-1E4F-49E5-8DD6-91DE1B512717}" dt="2025-07-01T20:25:35.203" v="290" actId="478"/>
-          <ac:spMkLst>
-            <pc:docMk/>
-            <pc:sldMk cId="1355674550" sldId="338"/>
-            <ac:spMk id="73" creationId="{DE469FBC-9285-B155-4855-8A588ACCFE35}"/>
-          </ac:spMkLst>
-        </pc:spChg>
-        <pc:spChg chg="add del">
-          <ac:chgData name="Lines, Todd" userId="afaf7c3a-e8aa-4568-882a-02ad8f9e19b0" providerId="ADAL" clId="{521B3133-1E4F-49E5-8DD6-91DE1B512717}" dt="2025-07-01T20:25:42.437" v="292" actId="478"/>
-          <ac:spMkLst>
-            <pc:docMk/>
-            <pc:sldMk cId="1355674550" sldId="338"/>
-            <ac:spMk id="74" creationId="{888E529D-1E49-00AE-3BE9-F8ED0A23F831}"/>
-          </ac:spMkLst>
-        </pc:spChg>
-        <pc:spChg chg="add mod">
-          <ac:chgData name="Lines, Todd" userId="afaf7c3a-e8aa-4568-882a-02ad8f9e19b0" providerId="ADAL" clId="{521B3133-1E4F-49E5-8DD6-91DE1B512717}" dt="2025-07-01T20:25:59.318" v="295" actId="1076"/>
-          <ac:spMkLst>
-            <pc:docMk/>
-            <pc:sldMk cId="1355674550" sldId="338"/>
-            <ac:spMk id="75" creationId="{48EAAA5D-EFFB-6DCD-91AC-6E3C2C9CDDFF}"/>
-          </ac:spMkLst>
-        </pc:spChg>
-        <pc:spChg chg="add mod">
-          <ac:chgData name="Lines, Todd" userId="afaf7c3a-e8aa-4568-882a-02ad8f9e19b0" providerId="ADAL" clId="{521B3133-1E4F-49E5-8DD6-91DE1B512717}" dt="2025-07-01T20:26:14.008" v="297" actId="1076"/>
-          <ac:spMkLst>
-            <pc:docMk/>
-            <pc:sldMk cId="1355674550" sldId="338"/>
-            <ac:spMk id="76" creationId="{2C7F55B2-4F9F-FCE6-C675-DA5E25BD8557}"/>
-          </ac:spMkLst>
-        </pc:spChg>
-        <pc:spChg chg="add mod">
-          <ac:chgData name="Lines, Todd" userId="afaf7c3a-e8aa-4568-882a-02ad8f9e19b0" providerId="ADAL" clId="{521B3133-1E4F-49E5-8DD6-91DE1B512717}" dt="2025-07-01T20:27:05.348" v="325" actId="1076"/>
-          <ac:spMkLst>
-            <pc:docMk/>
-            <pc:sldMk cId="1355674550" sldId="338"/>
-            <ac:spMk id="79" creationId="{8BE5746B-1206-503E-2EC8-27D57F1879BD}"/>
-          </ac:spMkLst>
-        </pc:spChg>
-        <pc:grpChg chg="del">
-          <ac:chgData name="Lines, Todd" userId="afaf7c3a-e8aa-4568-882a-02ad8f9e19b0" providerId="ADAL" clId="{521B3133-1E4F-49E5-8DD6-91DE1B512717}" dt="2025-07-01T20:20:30.951" v="229" actId="478"/>
-          <ac:grpSpMkLst>
-            <pc:docMk/>
-            <pc:sldMk cId="1355674550" sldId="338"/>
-            <ac:grpSpMk id="7" creationId="{445603A6-EE8B-9D7A-D951-62C9FE27E63C}"/>
-          </ac:grpSpMkLst>
-        </pc:grpChg>
-        <pc:grpChg chg="del">
-          <ac:chgData name="Lines, Todd" userId="afaf7c3a-e8aa-4568-882a-02ad8f9e19b0" providerId="ADAL" clId="{521B3133-1E4F-49E5-8DD6-91DE1B512717}" dt="2025-07-01T20:25:13.093" v="286" actId="478"/>
-          <ac:grpSpMkLst>
-            <pc:docMk/>
-            <pc:sldMk cId="1355674550" sldId="338"/>
-            <ac:grpSpMk id="17" creationId="{78C813DE-DDCF-ED92-99F5-4ABBC09A2F0F}"/>
-          </ac:grpSpMkLst>
-        </pc:grpChg>
-        <pc:picChg chg="del">
-          <ac:chgData name="Lines, Todd" userId="afaf7c3a-e8aa-4568-882a-02ad8f9e19b0" providerId="ADAL" clId="{521B3133-1E4F-49E5-8DD6-91DE1B512717}" dt="2025-07-01T20:25:06.570" v="282" actId="478"/>
-          <ac:picMkLst>
-            <pc:docMk/>
-            <pc:sldMk cId="1355674550" sldId="338"/>
-            <ac:picMk id="71" creationId="{51F5173E-CBFA-8E71-53D2-3CFE820853AB}"/>
-          </ac:picMkLst>
-        </pc:picChg>
-        <pc:picChg chg="del mod">
-          <ac:chgData name="Lines, Todd" userId="afaf7c3a-e8aa-4568-882a-02ad8f9e19b0" providerId="ADAL" clId="{521B3133-1E4F-49E5-8DD6-91DE1B512717}" dt="2025-07-01T20:22:22.683" v="278" actId="21"/>
-          <ac:picMkLst>
-            <pc:docMk/>
-            <pc:sldMk cId="1355674550" sldId="338"/>
-            <ac:picMk id="72" creationId="{D326DDC6-EF5E-7F28-2F6B-C1BE6DA49B25}"/>
-          </ac:picMkLst>
-        </pc:picChg>
-        <pc:picChg chg="del mod">
-          <ac:chgData name="Lines, Todd" userId="afaf7c3a-e8aa-4568-882a-02ad8f9e19b0" providerId="ADAL" clId="{521B3133-1E4F-49E5-8DD6-91DE1B512717}" dt="2025-07-01T20:27:18.004" v="327" actId="21"/>
-          <ac:picMkLst>
-            <pc:docMk/>
-            <pc:sldMk cId="1355674550" sldId="338"/>
-            <ac:picMk id="80" creationId="{23D06E94-2608-4D0E-C2C3-8C842370A4CF}"/>
-          </ac:picMkLst>
-        </pc:picChg>
-        <pc:cxnChg chg="add mod">
-          <ac:chgData name="Lines, Todd" userId="afaf7c3a-e8aa-4568-882a-02ad8f9e19b0" providerId="ADAL" clId="{521B3133-1E4F-49E5-8DD6-91DE1B512717}" dt="2025-07-01T20:28:25.680" v="328" actId="1582"/>
-          <ac:cxnSpMkLst>
-            <pc:docMk/>
-            <pc:sldMk cId="1355674550" sldId="338"/>
-            <ac:cxnSpMk id="78" creationId="{B9BD5E4D-64DB-CDC3-A5B8-957D3CD62172}"/>
-          </ac:cxnSpMkLst>
-        </pc:cxnChg>
-      </pc:sldChg>
-      <pc:sldChg chg="delSp add mod">
-        <pc:chgData name="Lines, Todd" userId="afaf7c3a-e8aa-4568-882a-02ad8f9e19b0" providerId="ADAL" clId="{521B3133-1E4F-49E5-8DD6-91DE1B512717}" dt="2025-07-01T20:25:04.735" v="281" actId="478"/>
-        <pc:sldMkLst>
-          <pc:docMk/>
-          <pc:sldMk cId="3617555169" sldId="339"/>
-        </pc:sldMkLst>
-        <pc:spChg chg="del">
-          <ac:chgData name="Lines, Todd" userId="afaf7c3a-e8aa-4568-882a-02ad8f9e19b0" providerId="ADAL" clId="{521B3133-1E4F-49E5-8DD6-91DE1B512717}" dt="2025-07-01T20:25:04.735" v="281" actId="478"/>
-          <ac:spMkLst>
-            <pc:docMk/>
-            <pc:sldMk cId="3617555169" sldId="339"/>
-            <ac:spMk id="14" creationId="{CE1561D2-D5A5-3543-3C3F-F2B6CEECABBF}"/>
-          </ac:spMkLst>
-        </pc:spChg>
-        <pc:picChg chg="del">
-          <ac:chgData name="Lines, Todd" userId="afaf7c3a-e8aa-4568-882a-02ad8f9e19b0" providerId="ADAL" clId="{521B3133-1E4F-49E5-8DD6-91DE1B512717}" dt="2025-07-01T20:25:00.782" v="280" actId="478"/>
-          <ac:picMkLst>
-            <pc:docMk/>
-            <pc:sldMk cId="3617555169" sldId="339"/>
-            <ac:picMk id="71" creationId="{F75718F8-4836-43BB-6DB6-3C2D3CD5DA7F}"/>
-          </ac:picMkLst>
-        </pc:picChg>
-      </pc:sldChg>
-      <pc:sldChg chg="add">
-        <pc:chgData name="Lines, Todd" userId="afaf7c3a-e8aa-4568-882a-02ad8f9e19b0" providerId="ADAL" clId="{521B3133-1E4F-49E5-8DD6-91DE1B512717}" dt="2025-07-01T20:50:49.051" v="329"/>
-        <pc:sldMkLst>
-          <pc:docMk/>
-          <pc:sldMk cId="0" sldId="340"/>
         </pc:sldMkLst>
       </pc:sldChg>
     </pc:docChg>
@@ -1678,7 +898,7 @@
           <a:p>
             <a:fld id="{B2A73DB0-950E-47F7-8EFB-CBAFA6922218}" type="datetimeFigureOut">
               <a:rPr lang="en-US" smtClean="0"/>
-              <a:t>7/1/2025</a:t>
+              <a:t>3/24/2026</a:t>
             </a:fld>
             <a:endParaRPr lang="en-US"/>
           </a:p>
@@ -2034,7 +1254,7 @@
           <a:p>
             <a:fld id="{5C78E4C3-3EB2-46A4-993F-B797239F9983}" type="slidenum">
               <a:rPr lang="en-US" smtClean="0"/>
-              <a:t>17</a:t>
+              <a:t>16</a:t>
             </a:fld>
             <a:endParaRPr lang="en-US"/>
           </a:p>
@@ -2118,7 +1338,7 @@
           <a:p>
             <a:fld id="{5C78E4C3-3EB2-46A4-993F-B797239F9983}" type="slidenum">
               <a:rPr lang="en-US" smtClean="0"/>
-              <a:t>18</a:t>
+              <a:t>17</a:t>
             </a:fld>
             <a:endParaRPr lang="en-US"/>
           </a:p>
@@ -2317,7 +1537,7 @@
             <a:fld id="{74DFFF08-C373-4C5C-957C-1BB06FB405E9}" type="datetimeFigureOut">
               <a:rPr lang="en-US" smtClean="0"/>
               <a:pPr/>
-              <a:t>7/1/2025</a:t>
+              <a:t>3/24/2026</a:t>
             </a:fld>
             <a:endParaRPr lang="en-US"/>
           </a:p>
@@ -2482,7 +1702,7 @@
             <a:fld id="{74DFFF08-C373-4C5C-957C-1BB06FB405E9}" type="datetimeFigureOut">
               <a:rPr lang="en-US" smtClean="0"/>
               <a:pPr/>
-              <a:t>7/1/2025</a:t>
+              <a:t>3/24/2026</a:t>
             </a:fld>
             <a:endParaRPr lang="en-US"/>
           </a:p>
@@ -2657,7 +1877,7 @@
             <a:fld id="{74DFFF08-C373-4C5C-957C-1BB06FB405E9}" type="datetimeFigureOut">
               <a:rPr lang="en-US" smtClean="0"/>
               <a:pPr/>
-              <a:t>7/1/2025</a:t>
+              <a:t>3/24/2026</a:t>
             </a:fld>
             <a:endParaRPr lang="en-US"/>
           </a:p>
@@ -3057,7 +2277,7 @@
             <a:fld id="{74DFFF08-C373-4C5C-957C-1BB06FB405E9}" type="datetimeFigureOut">
               <a:rPr lang="en-US" smtClean="0"/>
               <a:pPr/>
-              <a:t>7/1/2025</a:t>
+              <a:t>3/24/2026</a:t>
             </a:fld>
             <a:endParaRPr lang="en-US"/>
           </a:p>
@@ -3299,7 +2519,7 @@
             <a:fld id="{74DFFF08-C373-4C5C-957C-1BB06FB405E9}" type="datetimeFigureOut">
               <a:rPr lang="en-US" smtClean="0"/>
               <a:pPr/>
-              <a:t>7/1/2025</a:t>
+              <a:t>3/24/2026</a:t>
             </a:fld>
             <a:endParaRPr lang="en-US"/>
           </a:p>
@@ -3581,7 +2801,7 @@
             <a:fld id="{74DFFF08-C373-4C5C-957C-1BB06FB405E9}" type="datetimeFigureOut">
               <a:rPr lang="en-US" smtClean="0"/>
               <a:pPr/>
-              <a:t>7/1/2025</a:t>
+              <a:t>3/24/2026</a:t>
             </a:fld>
             <a:endParaRPr lang="en-US"/>
           </a:p>
@@ -3997,7 +3217,7 @@
             <a:fld id="{74DFFF08-C373-4C5C-957C-1BB06FB405E9}" type="datetimeFigureOut">
               <a:rPr lang="en-US" smtClean="0"/>
               <a:pPr/>
-              <a:t>7/1/2025</a:t>
+              <a:t>3/24/2026</a:t>
             </a:fld>
             <a:endParaRPr lang="en-US"/>
           </a:p>
@@ -4111,7 +3331,7 @@
             <a:fld id="{74DFFF08-C373-4C5C-957C-1BB06FB405E9}" type="datetimeFigureOut">
               <a:rPr lang="en-US" smtClean="0"/>
               <a:pPr/>
-              <a:t>7/1/2025</a:t>
+              <a:t>3/24/2026</a:t>
             </a:fld>
             <a:endParaRPr lang="en-US"/>
           </a:p>
@@ -4203,7 +3423,7 @@
             <a:fld id="{74DFFF08-C373-4C5C-957C-1BB06FB405E9}" type="datetimeFigureOut">
               <a:rPr lang="en-US" smtClean="0"/>
               <a:pPr/>
-              <a:t>7/1/2025</a:t>
+              <a:t>3/24/2026</a:t>
             </a:fld>
             <a:endParaRPr lang="en-US"/>
           </a:p>
@@ -4475,7 +3695,7 @@
             <a:fld id="{74DFFF08-C373-4C5C-957C-1BB06FB405E9}" type="datetimeFigureOut">
               <a:rPr lang="en-US" smtClean="0"/>
               <a:pPr/>
-              <a:t>7/1/2025</a:t>
+              <a:t>3/24/2026</a:t>
             </a:fld>
             <a:endParaRPr lang="en-US"/>
           </a:p>
@@ -4724,7 +3944,7 @@
             <a:fld id="{74DFFF08-C373-4C5C-957C-1BB06FB405E9}" type="datetimeFigureOut">
               <a:rPr lang="en-US" smtClean="0"/>
               <a:pPr/>
-              <a:t>7/1/2025</a:t>
+              <a:t>3/24/2026</a:t>
             </a:fld>
             <a:endParaRPr lang="en-US"/>
           </a:p>
@@ -4932,7 +4152,7 @@
             <a:fld id="{74DFFF08-C373-4C5C-957C-1BB06FB405E9}" type="datetimeFigureOut">
               <a:rPr lang="en-US" smtClean="0"/>
               <a:pPr/>
-              <a:t>7/1/2025</a:t>
+              <a:t>3/24/2026</a:t>
             </a:fld>
             <a:endParaRPr lang="en-US"/>
           </a:p>
@@ -5387,199 +4607,6 @@
           <a:chExt cx="0" cy="0"/>
         </a:xfrm>
       </p:grpSpPr>
-      <p:sp>
-        <p:nvSpPr>
-          <p:cNvPr id="2" name="Title 1"/>
-          <p:cNvSpPr>
-            <a:spLocks noGrp="1"/>
-          </p:cNvSpPr>
-          <p:nvPr>
-            <p:ph type="title"/>
-          </p:nvPr>
-        </p:nvSpPr>
-        <p:spPr/>
-        <p:txBody>
-          <a:bodyPr/>
-          <a:lstStyle/>
-          <a:p>
-            <a:endParaRPr lang="en-US"/>
-          </a:p>
-        </p:txBody>
-      </p:sp>
-      <p:sp>
-        <p:nvSpPr>
-          <p:cNvPr id="3" name="Content Placeholder 2"/>
-          <p:cNvSpPr>
-            <a:spLocks noGrp="1"/>
-          </p:cNvSpPr>
-          <p:nvPr>
-            <p:ph idx="1"/>
-          </p:nvPr>
-        </p:nvSpPr>
-        <p:spPr/>
-        <p:txBody>
-          <a:bodyPr/>
-          <a:lstStyle/>
-          <a:p>
-            <a:endParaRPr lang="en-US"/>
-          </a:p>
-        </p:txBody>
-      </p:sp>
-      <p:pic>
-        <p:nvPicPr>
-          <p:cNvPr id="41986" name="Picture 2" descr="http://classic.mormonchannel.org/sites/default/files/PER-10-elder-neal-a-maxwell-01.jpg"/>
-          <p:cNvPicPr>
-            <a:picLocks noChangeAspect="1" noChangeArrowheads="1"/>
-          </p:cNvPicPr>
-          <p:nvPr/>
-        </p:nvPicPr>
-        <p:blipFill>
-          <a:blip r:embed="rId2">
-            <a:extLst>
-              <a:ext uri="{28A0092B-C50C-407E-A947-70E740481C1C}">
-                <a14:useLocalDpi xmlns:a14="http://schemas.microsoft.com/office/drawing/2010/main" val="0"/>
-              </a:ext>
-            </a:extLst>
-          </a:blip>
-          <a:srcRect/>
-          <a:stretch>
-            <a:fillRect/>
-          </a:stretch>
-        </p:blipFill>
-        <p:spPr bwMode="auto">
-          <a:xfrm>
-            <a:off x="838200" y="914400"/>
-            <a:ext cx="3886200" cy="4762500"/>
-          </a:xfrm>
-          <a:prstGeom prst="rect">
-            <a:avLst/>
-          </a:prstGeom>
-          <a:noFill/>
-          <a:extLst>
-            <a:ext uri="{909E8E84-426E-40DD-AFC4-6F175D3DCCD1}">
-              <a14:hiddenFill xmlns:a14="http://schemas.microsoft.com/office/drawing/2010/main">
-                <a:solidFill>
-                  <a:srgbClr val="FFFFFF"/>
-                </a:solidFill>
-              </a14:hiddenFill>
-            </a:ext>
-          </a:extLst>
-        </p:spPr>
-      </p:pic>
-      <p:sp>
-        <p:nvSpPr>
-          <p:cNvPr id="6" name="Text Box 4"/>
-          <p:cNvSpPr txBox="1">
-            <a:spLocks noChangeArrowheads="1"/>
-          </p:cNvSpPr>
-          <p:nvPr/>
-        </p:nvSpPr>
-        <p:spPr bwMode="auto">
-          <a:xfrm>
-            <a:off x="1371600" y="5715000"/>
-            <a:ext cx="3048000" cy="1015663"/>
-          </a:xfrm>
-          <a:prstGeom prst="rect">
-            <a:avLst/>
-          </a:prstGeom>
-          <a:noFill/>
-          <a:ln w="9525">
-            <a:noFill/>
-            <a:miter lim="800000"/>
-            <a:headEnd/>
-            <a:tailEnd/>
-          </a:ln>
-        </p:spPr>
-        <p:txBody>
-          <a:bodyPr>
-            <a:spAutoFit/>
-          </a:bodyPr>
-          <a:lstStyle/>
-          <a:p>
-            <a:pPr eaLnBrk="0" hangingPunct="0">
-              <a:spcBef>
-                <a:spcPct val="50000"/>
-              </a:spcBef>
-            </a:pPr>
-            <a:r>
-              <a:rPr lang="en-US" sz="2400" dirty="0"/>
-              <a:t>Neal A. Maxwell</a:t>
-            </a:r>
-          </a:p>
-          <a:p>
-            <a:pPr eaLnBrk="0" hangingPunct="0">
-              <a:spcBef>
-                <a:spcPct val="50000"/>
-              </a:spcBef>
-            </a:pPr>
-            <a:r>
-              <a:rPr lang="en-US" sz="2400" dirty="0">
-                <a:latin typeface="Times New Roman" pitchFamily="18" charset="0"/>
-              </a:rPr>
-              <a:t>(1926-2004)</a:t>
-            </a:r>
-          </a:p>
-        </p:txBody>
-      </p:sp>
-      <p:sp>
-        <p:nvSpPr>
-          <p:cNvPr id="7" name="TextBox 6"/>
-          <p:cNvSpPr txBox="1"/>
-          <p:nvPr/>
-        </p:nvSpPr>
-        <p:spPr>
-          <a:xfrm>
-            <a:off x="5867400" y="1371600"/>
-            <a:ext cx="2362200" cy="1077218"/>
-          </a:xfrm>
-          <a:prstGeom prst="rect">
-            <a:avLst/>
-          </a:prstGeom>
-          <a:noFill/>
-        </p:spPr>
-        <p:txBody>
-          <a:bodyPr wrap="square" rtlCol="0">
-            <a:spAutoFit/>
-          </a:bodyPr>
-          <a:lstStyle/>
-          <a:p>
-            <a:r>
-              <a:rPr lang="en-US" sz="3200" dirty="0"/>
-              <a:t>Not the same guy</a:t>
-            </a:r>
-          </a:p>
-        </p:txBody>
-      </p:sp>
-    </p:spTree>
-    <p:extLst>
-      <p:ext uri="{BB962C8B-B14F-4D97-AF65-F5344CB8AC3E}">
-        <p14:creationId xmlns:p14="http://schemas.microsoft.com/office/powerpoint/2010/main" val="2282245805"/>
-      </p:ext>
-    </p:extLst>
-  </p:cSld>
-  <p:clrMapOvr>
-    <a:masterClrMapping/>
-  </p:clrMapOvr>
-</p:sld>
-</file>
-
-<file path=ppt/slides/slide11.xml><?xml version="1.0" encoding="utf-8"?>
-<p:sld xmlns:a="http://schemas.openxmlformats.org/drawingml/2006/main" xmlns:r="http://schemas.openxmlformats.org/officeDocument/2006/relationships" xmlns:p="http://schemas.openxmlformats.org/presentationml/2006/main">
-  <p:cSld>
-    <p:spTree>
-      <p:nvGrpSpPr>
-        <p:cNvPr id="1" name=""/>
-        <p:cNvGrpSpPr/>
-        <p:nvPr/>
-      </p:nvGrpSpPr>
-      <p:grpSpPr>
-        <a:xfrm>
-          <a:off x="0" y="0"/>
-          <a:ext cx="0" cy="0"/>
-          <a:chOff x="0" y="0"/>
-          <a:chExt cx="0" cy="0"/>
-        </a:xfrm>
-      </p:grpSpPr>
       <p:graphicFrame>
         <p:nvGraphicFramePr>
           <p:cNvPr id="4" name="Chart 3">
@@ -5833,7 +4860,7 @@
 </p:sld>
 </file>
 
-<file path=ppt/slides/slide12.xml><?xml version="1.0" encoding="utf-8"?>
+<file path=ppt/slides/slide11.xml><?xml version="1.0" encoding="utf-8"?>
 <p:sld xmlns:a="http://schemas.openxmlformats.org/drawingml/2006/main" xmlns:r="http://schemas.openxmlformats.org/officeDocument/2006/relationships" xmlns:p="http://schemas.openxmlformats.org/presentationml/2006/main">
   <p:cSld>
     <p:spTree>
@@ -6036,7 +5063,7 @@
 </p:sld>
 </file>
 
-<file path=ppt/slides/slide13.xml><?xml version="1.0" encoding="utf-8"?>
+<file path=ppt/slides/slide12.xml><?xml version="1.0" encoding="utf-8"?>
 <p:sld xmlns:a="http://schemas.openxmlformats.org/drawingml/2006/main" xmlns:r="http://schemas.openxmlformats.org/officeDocument/2006/relationships" xmlns:p="http://schemas.openxmlformats.org/presentationml/2006/main">
   <p:cSld>
     <p:spTree>
@@ -6073,7 +5100,7 @@
             <a:fld id="{917D1039-81FC-40ED-A6C1-7BAC07FF53B2}" type="slidenum">
               <a:rPr lang="en-US" smtClean="0"/>
               <a:pPr/>
-              <a:t>13</a:t>
+              <a:t>12</a:t>
             </a:fld>
             <a:endParaRPr lang="en-US"/>
           </a:p>
@@ -6181,7 +5208,7 @@
 </p:sld>
 </file>
 
-<file path=ppt/slides/slide14.xml><?xml version="1.0" encoding="utf-8"?>
+<file path=ppt/slides/slide13.xml><?xml version="1.0" encoding="utf-8"?>
 <p:sld xmlns:a="http://schemas.openxmlformats.org/drawingml/2006/main" xmlns:r="http://schemas.openxmlformats.org/officeDocument/2006/relationships" xmlns:p="http://schemas.openxmlformats.org/presentationml/2006/main">
   <p:cSld>
     <p:spTree>
@@ -6387,7 +5414,7 @@
 </p:sld>
 </file>
 
-<file path=ppt/slides/slide15.xml><?xml version="1.0" encoding="utf-8"?>
+<file path=ppt/slides/slide14.xml><?xml version="1.0" encoding="utf-8"?>
 <p:sld xmlns:a="http://schemas.openxmlformats.org/drawingml/2006/main" xmlns:r="http://schemas.openxmlformats.org/officeDocument/2006/relationships" xmlns:p="http://schemas.openxmlformats.org/presentationml/2006/main">
   <p:cSld>
     <p:spTree>
@@ -6883,7 +5910,7 @@
 </p:sld>
 </file>
 
-<file path=ppt/slides/slide16.xml><?xml version="1.0" encoding="utf-8"?>
+<file path=ppt/slides/slide15.xml><?xml version="1.0" encoding="utf-8"?>
 <p:sld xmlns:a="http://schemas.openxmlformats.org/drawingml/2006/main" xmlns:r="http://schemas.openxmlformats.org/officeDocument/2006/relationships" xmlns:p="http://schemas.openxmlformats.org/presentationml/2006/main">
   <p:cSld>
     <p:spTree>
@@ -12564,7 +11591,7 @@
 </p:sld>
 </file>
 
-<file path=ppt/slides/slide17.xml><?xml version="1.0" encoding="utf-8"?>
+<file path=ppt/slides/slide16.xml><?xml version="1.0" encoding="utf-8"?>
 <p:sld xmlns:a="http://schemas.openxmlformats.org/drawingml/2006/main" xmlns:r="http://schemas.openxmlformats.org/officeDocument/2006/relationships" xmlns:p="http://schemas.openxmlformats.org/presentationml/2006/main">
   <p:cSld>
     <p:spTree>
@@ -15056,7 +14083,7 @@
 </p:sld>
 </file>
 
-<file path=ppt/slides/slide18.xml><?xml version="1.0" encoding="utf-8"?>
+<file path=ppt/slides/slide17.xml><?xml version="1.0" encoding="utf-8"?>
 <p:sld xmlns:a="http://schemas.openxmlformats.org/drawingml/2006/main" xmlns:r="http://schemas.openxmlformats.org/officeDocument/2006/relationships" xmlns:p="http://schemas.openxmlformats.org/presentationml/2006/main">
   <p:cSld>
     <p:spTree>
@@ -15661,7 +14688,7 @@
 </p:sld>
 </file>
 
-<file path=ppt/slides/slide19.xml><?xml version="1.0" encoding="utf-8"?>
+<file path=ppt/slides/slide18.xml><?xml version="1.0" encoding="utf-8"?>
 <p:sld xmlns:a="http://schemas.openxmlformats.org/drawingml/2006/main" xmlns:r="http://schemas.openxmlformats.org/officeDocument/2006/relationships" xmlns:p="http://schemas.openxmlformats.org/presentationml/2006/main">
   <p:cSld>
     <p:spTree>
@@ -16210,152 +15237,7 @@
 </p:sld>
 </file>
 
-<file path=ppt/slides/slide2.xml><?xml version="1.0" encoding="utf-8"?>
-<p:sld xmlns:a="http://schemas.openxmlformats.org/drawingml/2006/main" xmlns:r="http://schemas.openxmlformats.org/officeDocument/2006/relationships" xmlns:p="http://schemas.openxmlformats.org/presentationml/2006/main">
-  <p:cSld>
-    <p:spTree>
-      <p:nvGrpSpPr>
-        <p:cNvPr id="1" name=""/>
-        <p:cNvGrpSpPr/>
-        <p:nvPr/>
-      </p:nvGrpSpPr>
-      <p:grpSpPr>
-        <a:xfrm>
-          <a:off x="0" y="0"/>
-          <a:ext cx="0" cy="0"/>
-          <a:chOff x="0" y="0"/>
-          <a:chExt cx="0" cy="0"/>
-        </a:xfrm>
-      </p:grpSpPr>
-      <p:sp>
-        <p:nvSpPr>
-          <p:cNvPr id="191490" name="Slide Number Placeholder 5"/>
-          <p:cNvSpPr>
-            <a:spLocks noGrp="1"/>
-          </p:cNvSpPr>
-          <p:nvPr>
-            <p:ph type="sldNum" sz="quarter" idx="12"/>
-          </p:nvPr>
-        </p:nvSpPr>
-        <p:spPr>
-          <a:noFill/>
-        </p:spPr>
-        <p:txBody>
-          <a:bodyPr/>
-          <a:lstStyle/>
-          <a:p>
-            <a:fld id="{7B811258-4C3E-4805-B66A-2765416DF697}" type="slidenum">
-              <a:rPr lang="en-US" smtClean="0"/>
-              <a:pPr/>
-              <a:t>2</a:t>
-            </a:fld>
-            <a:endParaRPr lang="en-US"/>
-          </a:p>
-        </p:txBody>
-      </p:sp>
-      <p:sp>
-        <p:nvSpPr>
-          <p:cNvPr id="191491" name="Rectangle 2"/>
-          <p:cNvSpPr>
-            <a:spLocks noGrp="1" noChangeArrowheads="1"/>
-          </p:cNvSpPr>
-          <p:nvPr>
-            <p:ph type="title"/>
-          </p:nvPr>
-        </p:nvSpPr>
-        <p:spPr/>
-        <p:txBody>
-          <a:bodyPr/>
-          <a:lstStyle/>
-          <a:p>
-            <a:pPr eaLnBrk="1" hangingPunct="1"/>
-            <a:r>
-              <a:rPr lang="en-US" dirty="0"/>
-              <a:t>Question 123.14.1.5</a:t>
-            </a:r>
-          </a:p>
-        </p:txBody>
-      </p:sp>
-      <p:sp>
-        <p:nvSpPr>
-          <p:cNvPr id="191492" name="Rectangle 3"/>
-          <p:cNvSpPr>
-            <a:spLocks noGrp="1" noChangeArrowheads="1"/>
-          </p:cNvSpPr>
-          <p:nvPr>
-            <p:ph type="body" idx="1"/>
-          </p:nvPr>
-        </p:nvSpPr>
-        <p:spPr/>
-        <p:txBody>
-          <a:bodyPr/>
-          <a:lstStyle/>
-          <a:p>
-            <a:pPr marL="609600" indent="-609600" eaLnBrk="1" hangingPunct="1">
-              <a:buFontTx/>
-              <a:buNone/>
-            </a:pPr>
-            <a:r>
-              <a:rPr lang="en-US" dirty="0"/>
-              <a:t>A car is driving down I-20 at 70mph (the new speed limit). Does the center of mass of the car have the same kinetic energy as a piston in the engine?</a:t>
-            </a:r>
-          </a:p>
-          <a:p>
-            <a:pPr marL="609600" indent="-609600" eaLnBrk="1" hangingPunct="1">
-              <a:buFontTx/>
-              <a:buAutoNum type="alphaLcParenR"/>
-            </a:pPr>
-            <a:r>
-              <a:rPr lang="en-US" dirty="0"/>
-              <a:t>Yes</a:t>
-            </a:r>
-          </a:p>
-          <a:p>
-            <a:pPr marL="609600" indent="-609600" eaLnBrk="1" hangingPunct="1">
-              <a:buFontTx/>
-              <a:buAutoNum type="alphaLcParenR"/>
-            </a:pPr>
-            <a:r>
-              <a:rPr lang="en-US" dirty="0"/>
-              <a:t>No</a:t>
-            </a:r>
-          </a:p>
-          <a:p>
-            <a:pPr marL="609600" indent="-609600" eaLnBrk="1" hangingPunct="1">
-              <a:buFontTx/>
-              <a:buAutoNum type="alphaLcParenR"/>
-            </a:pPr>
-            <a:r>
-              <a:rPr lang="en-US" dirty="0"/>
-              <a:t>Maybe</a:t>
-            </a:r>
-          </a:p>
-          <a:p>
-            <a:pPr marL="609600" indent="-609600" eaLnBrk="1" hangingPunct="1">
-              <a:buFontTx/>
-              <a:buAutoNum type="alphaLcParenR"/>
-            </a:pPr>
-            <a:r>
-              <a:rPr lang="en-US" dirty="0"/>
-              <a:t>Wait, the speed limit changed?</a:t>
-            </a:r>
-          </a:p>
-        </p:txBody>
-      </p:sp>
-    </p:spTree>
-    <p:extLst>
-      <p:ext uri="{BB962C8B-B14F-4D97-AF65-F5344CB8AC3E}">
-        <p14:creationId xmlns:p14="http://schemas.microsoft.com/office/powerpoint/2010/main" val="527013498"/>
-      </p:ext>
-    </p:extLst>
-  </p:cSld>
-  <p:clrMapOvr>
-    <a:masterClrMapping/>
-  </p:clrMapOvr>
-</p:sld>
-</file>
-
-<file path=ppt/slides/slide20.xml><?xml version="1.0" encoding="utf-8"?>
+<file path=ppt/slides/slide19.xml><?xml version="1.0" encoding="utf-8"?>
 <p:sld xmlns:a="http://schemas.openxmlformats.org/drawingml/2006/main" xmlns:r="http://schemas.openxmlformats.org/officeDocument/2006/relationships" xmlns:p="http://schemas.openxmlformats.org/presentationml/2006/main">
   <p:cSld>
     <p:spTree>
@@ -16451,7 +15333,152 @@
 </p:sld>
 </file>
 
-<file path=ppt/slides/slide21.xml><?xml version="1.0" encoding="utf-8"?>
+<file path=ppt/slides/slide2.xml><?xml version="1.0" encoding="utf-8"?>
+<p:sld xmlns:a="http://schemas.openxmlformats.org/drawingml/2006/main" xmlns:r="http://schemas.openxmlformats.org/officeDocument/2006/relationships" xmlns:p="http://schemas.openxmlformats.org/presentationml/2006/main">
+  <p:cSld>
+    <p:spTree>
+      <p:nvGrpSpPr>
+        <p:cNvPr id="1" name=""/>
+        <p:cNvGrpSpPr/>
+        <p:nvPr/>
+      </p:nvGrpSpPr>
+      <p:grpSpPr>
+        <a:xfrm>
+          <a:off x="0" y="0"/>
+          <a:ext cx="0" cy="0"/>
+          <a:chOff x="0" y="0"/>
+          <a:chExt cx="0" cy="0"/>
+        </a:xfrm>
+      </p:grpSpPr>
+      <p:sp>
+        <p:nvSpPr>
+          <p:cNvPr id="191490" name="Slide Number Placeholder 5"/>
+          <p:cNvSpPr>
+            <a:spLocks noGrp="1"/>
+          </p:cNvSpPr>
+          <p:nvPr>
+            <p:ph type="sldNum" sz="quarter" idx="12"/>
+          </p:nvPr>
+        </p:nvSpPr>
+        <p:spPr>
+          <a:noFill/>
+        </p:spPr>
+        <p:txBody>
+          <a:bodyPr/>
+          <a:lstStyle/>
+          <a:p>
+            <a:fld id="{7B811258-4C3E-4805-B66A-2765416DF697}" type="slidenum">
+              <a:rPr lang="en-US" smtClean="0"/>
+              <a:pPr/>
+              <a:t>2</a:t>
+            </a:fld>
+            <a:endParaRPr lang="en-US"/>
+          </a:p>
+        </p:txBody>
+      </p:sp>
+      <p:sp>
+        <p:nvSpPr>
+          <p:cNvPr id="191491" name="Rectangle 2"/>
+          <p:cNvSpPr>
+            <a:spLocks noGrp="1" noChangeArrowheads="1"/>
+          </p:cNvSpPr>
+          <p:nvPr>
+            <p:ph type="title"/>
+          </p:nvPr>
+        </p:nvSpPr>
+        <p:spPr/>
+        <p:txBody>
+          <a:bodyPr/>
+          <a:lstStyle/>
+          <a:p>
+            <a:pPr eaLnBrk="1" hangingPunct="1"/>
+            <a:r>
+              <a:rPr lang="en-US" dirty="0"/>
+              <a:t>Question 123.14.1.5</a:t>
+            </a:r>
+          </a:p>
+        </p:txBody>
+      </p:sp>
+      <p:sp>
+        <p:nvSpPr>
+          <p:cNvPr id="191492" name="Rectangle 3"/>
+          <p:cNvSpPr>
+            <a:spLocks noGrp="1" noChangeArrowheads="1"/>
+          </p:cNvSpPr>
+          <p:nvPr>
+            <p:ph type="body" idx="1"/>
+          </p:nvPr>
+        </p:nvSpPr>
+        <p:spPr/>
+        <p:txBody>
+          <a:bodyPr/>
+          <a:lstStyle/>
+          <a:p>
+            <a:pPr marL="609600" indent="-609600" eaLnBrk="1" hangingPunct="1">
+              <a:buFontTx/>
+              <a:buNone/>
+            </a:pPr>
+            <a:r>
+              <a:rPr lang="en-US" dirty="0"/>
+              <a:t>A car is driving down I-20 at 70mph (the new speed limit). Does the center of mass of the car have the same kinetic energy as a piston in the engine?</a:t>
+            </a:r>
+          </a:p>
+          <a:p>
+            <a:pPr marL="609600" indent="-609600" eaLnBrk="1" hangingPunct="1">
+              <a:buFontTx/>
+              <a:buAutoNum type="alphaLcParenR"/>
+            </a:pPr>
+            <a:r>
+              <a:rPr lang="en-US" dirty="0"/>
+              <a:t>Yes</a:t>
+            </a:r>
+          </a:p>
+          <a:p>
+            <a:pPr marL="609600" indent="-609600" eaLnBrk="1" hangingPunct="1">
+              <a:buFontTx/>
+              <a:buAutoNum type="alphaLcParenR"/>
+            </a:pPr>
+            <a:r>
+              <a:rPr lang="en-US" dirty="0"/>
+              <a:t>No</a:t>
+            </a:r>
+          </a:p>
+          <a:p>
+            <a:pPr marL="609600" indent="-609600" eaLnBrk="1" hangingPunct="1">
+              <a:buFontTx/>
+              <a:buAutoNum type="alphaLcParenR"/>
+            </a:pPr>
+            <a:r>
+              <a:rPr lang="en-US" dirty="0"/>
+              <a:t>Maybe</a:t>
+            </a:r>
+          </a:p>
+          <a:p>
+            <a:pPr marL="609600" indent="-609600" eaLnBrk="1" hangingPunct="1">
+              <a:buFontTx/>
+              <a:buAutoNum type="alphaLcParenR"/>
+            </a:pPr>
+            <a:r>
+              <a:rPr lang="en-US" dirty="0"/>
+              <a:t>Wait, the speed limit changed?</a:t>
+            </a:r>
+          </a:p>
+        </p:txBody>
+      </p:sp>
+    </p:spTree>
+    <p:extLst>
+      <p:ext uri="{BB962C8B-B14F-4D97-AF65-F5344CB8AC3E}">
+        <p14:creationId xmlns:p14="http://schemas.microsoft.com/office/powerpoint/2010/main" val="527013498"/>
+      </p:ext>
+    </p:extLst>
+  </p:cSld>
+  <p:clrMapOvr>
+    <a:masterClrMapping/>
+  </p:clrMapOvr>
+</p:sld>
+</file>
+
+<file path=ppt/slides/slide20.xml><?xml version="1.0" encoding="utf-8"?>
 <p:sld xmlns:a="http://schemas.openxmlformats.org/drawingml/2006/main" xmlns:r="http://schemas.openxmlformats.org/officeDocument/2006/relationships" xmlns:p="http://schemas.openxmlformats.org/presentationml/2006/main">
   <p:cSld>
     <p:spTree>
@@ -16525,6 +15552,199 @@
     <p:extLst>
       <p:ext uri="{BB962C8B-B14F-4D97-AF65-F5344CB8AC3E}">
         <p14:creationId xmlns:p14="http://schemas.microsoft.com/office/powerpoint/2010/main" val="3088791111"/>
+      </p:ext>
+    </p:extLst>
+  </p:cSld>
+  <p:clrMapOvr>
+    <a:masterClrMapping/>
+  </p:clrMapOvr>
+</p:sld>
+</file>
+
+<file path=ppt/slides/slide21.xml><?xml version="1.0" encoding="utf-8"?>
+<p:sld xmlns:a="http://schemas.openxmlformats.org/drawingml/2006/main" xmlns:r="http://schemas.openxmlformats.org/officeDocument/2006/relationships" xmlns:p="http://schemas.openxmlformats.org/presentationml/2006/main">
+  <p:cSld>
+    <p:spTree>
+      <p:nvGrpSpPr>
+        <p:cNvPr id="1" name=""/>
+        <p:cNvGrpSpPr/>
+        <p:nvPr/>
+      </p:nvGrpSpPr>
+      <p:grpSpPr>
+        <a:xfrm>
+          <a:off x="0" y="0"/>
+          <a:ext cx="0" cy="0"/>
+          <a:chOff x="0" y="0"/>
+          <a:chExt cx="0" cy="0"/>
+        </a:xfrm>
+      </p:grpSpPr>
+      <p:sp>
+        <p:nvSpPr>
+          <p:cNvPr id="2" name="Title 1"/>
+          <p:cNvSpPr>
+            <a:spLocks noGrp="1"/>
+          </p:cNvSpPr>
+          <p:nvPr>
+            <p:ph type="title"/>
+          </p:nvPr>
+        </p:nvSpPr>
+        <p:spPr/>
+        <p:txBody>
+          <a:bodyPr/>
+          <a:lstStyle/>
+          <a:p>
+            <a:endParaRPr lang="en-US"/>
+          </a:p>
+        </p:txBody>
+      </p:sp>
+      <p:sp>
+        <p:nvSpPr>
+          <p:cNvPr id="3" name="Content Placeholder 2"/>
+          <p:cNvSpPr>
+            <a:spLocks noGrp="1"/>
+          </p:cNvSpPr>
+          <p:nvPr>
+            <p:ph idx="1"/>
+          </p:nvPr>
+        </p:nvSpPr>
+        <p:spPr/>
+        <p:txBody>
+          <a:bodyPr/>
+          <a:lstStyle/>
+          <a:p>
+            <a:endParaRPr lang="en-US"/>
+          </a:p>
+        </p:txBody>
+      </p:sp>
+      <p:pic>
+        <p:nvPicPr>
+          <p:cNvPr id="41986" name="Picture 2" descr="http://classic.mormonchannel.org/sites/default/files/PER-10-elder-neal-a-maxwell-01.jpg"/>
+          <p:cNvPicPr>
+            <a:picLocks noChangeAspect="1" noChangeArrowheads="1"/>
+          </p:cNvPicPr>
+          <p:nvPr/>
+        </p:nvPicPr>
+        <p:blipFill>
+          <a:blip r:embed="rId2">
+            <a:extLst>
+              <a:ext uri="{28A0092B-C50C-407E-A947-70E740481C1C}">
+                <a14:useLocalDpi xmlns:a14="http://schemas.microsoft.com/office/drawing/2010/main" val="0"/>
+              </a:ext>
+            </a:extLst>
+          </a:blip>
+          <a:srcRect/>
+          <a:stretch>
+            <a:fillRect/>
+          </a:stretch>
+        </p:blipFill>
+        <p:spPr bwMode="auto">
+          <a:xfrm>
+            <a:off x="838200" y="914400"/>
+            <a:ext cx="3886200" cy="4762500"/>
+          </a:xfrm>
+          <a:prstGeom prst="rect">
+            <a:avLst/>
+          </a:prstGeom>
+          <a:noFill/>
+          <a:extLst>
+            <a:ext uri="{909E8E84-426E-40DD-AFC4-6F175D3DCCD1}">
+              <a14:hiddenFill xmlns:a14="http://schemas.microsoft.com/office/drawing/2010/main">
+                <a:solidFill>
+                  <a:srgbClr val="FFFFFF"/>
+                </a:solidFill>
+              </a14:hiddenFill>
+            </a:ext>
+          </a:extLst>
+        </p:spPr>
+      </p:pic>
+      <p:sp>
+        <p:nvSpPr>
+          <p:cNvPr id="6" name="Text Box 4"/>
+          <p:cNvSpPr txBox="1">
+            <a:spLocks noChangeArrowheads="1"/>
+          </p:cNvSpPr>
+          <p:nvPr/>
+        </p:nvSpPr>
+        <p:spPr bwMode="auto">
+          <a:xfrm>
+            <a:off x="1371600" y="5715000"/>
+            <a:ext cx="3048000" cy="1015663"/>
+          </a:xfrm>
+          <a:prstGeom prst="rect">
+            <a:avLst/>
+          </a:prstGeom>
+          <a:noFill/>
+          <a:ln w="9525">
+            <a:noFill/>
+            <a:miter lim="800000"/>
+            <a:headEnd/>
+            <a:tailEnd/>
+          </a:ln>
+        </p:spPr>
+        <p:txBody>
+          <a:bodyPr>
+            <a:spAutoFit/>
+          </a:bodyPr>
+          <a:lstStyle/>
+          <a:p>
+            <a:pPr eaLnBrk="0" hangingPunct="0">
+              <a:spcBef>
+                <a:spcPct val="50000"/>
+              </a:spcBef>
+            </a:pPr>
+            <a:r>
+              <a:rPr lang="en-US" sz="2400" dirty="0"/>
+              <a:t>Neal A. Maxwell</a:t>
+            </a:r>
+          </a:p>
+          <a:p>
+            <a:pPr eaLnBrk="0" hangingPunct="0">
+              <a:spcBef>
+                <a:spcPct val="50000"/>
+              </a:spcBef>
+            </a:pPr>
+            <a:r>
+              <a:rPr lang="en-US" sz="2400" dirty="0">
+                <a:latin typeface="Times New Roman" pitchFamily="18" charset="0"/>
+              </a:rPr>
+              <a:t>(1926-2004)</a:t>
+            </a:r>
+          </a:p>
+        </p:txBody>
+      </p:sp>
+      <p:sp>
+        <p:nvSpPr>
+          <p:cNvPr id="7" name="TextBox 6"/>
+          <p:cNvSpPr txBox="1"/>
+          <p:nvPr/>
+        </p:nvSpPr>
+        <p:spPr>
+          <a:xfrm>
+            <a:off x="5867400" y="1371600"/>
+            <a:ext cx="2362200" cy="1077218"/>
+          </a:xfrm>
+          <a:prstGeom prst="rect">
+            <a:avLst/>
+          </a:prstGeom>
+          <a:noFill/>
+        </p:spPr>
+        <p:txBody>
+          <a:bodyPr wrap="square" rtlCol="0">
+            <a:spAutoFit/>
+          </a:bodyPr>
+          <a:lstStyle/>
+          <a:p>
+            <a:r>
+              <a:rPr lang="en-US" sz="3200" dirty="0"/>
+              <a:t>Not the same guy</a:t>
+            </a:r>
+          </a:p>
+        </p:txBody>
+      </p:sp>
+    </p:spTree>
+    <p:extLst>
+      <p:ext uri="{BB962C8B-B14F-4D97-AF65-F5344CB8AC3E}">
+        <p14:creationId xmlns:p14="http://schemas.microsoft.com/office/powerpoint/2010/main" val="2282245805"/>
       </p:ext>
     </p:extLst>
   </p:cSld>
